--- a/korad-경영평가-ppt/KORAD_경영평가_블록_예시.pptx
+++ b/korad-경영평가-ppt/KORAD_경영평가_블록_예시.pptx
@@ -3201,14 +3201,14 @@
       </p:sp>
       <p:sp>
         <p:nvSpPr>
-          <p:cNvPr id="34" name="레일 쐐기"/>
+          <p:cNvPr id="34" name="레일 삼각형"/>
           <p:cNvSpPr/>
           <p:nvPr/>
         </p:nvSpPr>
         <p:spPr>
           <a:xfrm>
             <a:off x="547826" y="3678667"/>
-            <a:ext cx="580695" cy="142435"/>
+            <a:ext cx="580695" cy="131479"/>
           </a:xfrm>
           <a:custGeom>
             <a:avLst/>
@@ -3217,7 +3217,7 @@
             <a:cxnLst/>
             <a:rect l="l" t="t" r="r" b="b"/>
             <a:pathLst>
-              <a:path w="580695" h="142435">
+              <a:path w="580695" h="131479">
                 <a:moveTo>
                   <a:pt x="0" y="0"/>
                 </a:moveTo>
@@ -3225,7 +3225,7 @@
                   <a:pt x="580695" y="0"/>
                 </a:lnTo>
                 <a:lnTo>
-                  <a:pt x="290347" y="142435"/>
+                  <a:pt x="290347" y="131479"/>
                 </a:lnTo>
                 <a:close/>
               </a:path>
@@ -3599,14 +3599,14 @@
       </p:sp>
       <p:sp>
         <p:nvSpPr>
-          <p:cNvPr id="42" name="레일 쐐기"/>
+          <p:cNvPr id="42" name="레일 삼각형"/>
           <p:cNvSpPr/>
           <p:nvPr/>
         </p:nvSpPr>
         <p:spPr>
           <a:xfrm>
             <a:off x="547826" y="4352493"/>
-            <a:ext cx="580695" cy="142435"/>
+            <a:ext cx="580695" cy="131479"/>
           </a:xfrm>
           <a:custGeom>
             <a:avLst/>
@@ -3615,7 +3615,7 @@
             <a:cxnLst/>
             <a:rect l="l" t="t" r="r" b="b"/>
             <a:pathLst>
-              <a:path w="580695" h="142435">
+              <a:path w="580695" h="131479">
                 <a:moveTo>
                   <a:pt x="0" y="0"/>
                 </a:moveTo>
@@ -3623,7 +3623,7 @@
                   <a:pt x="580695" y="0"/>
                 </a:lnTo>
                 <a:lnTo>
-                  <a:pt x="290347" y="142435"/>
+                  <a:pt x="290347" y="131479"/>
                 </a:lnTo>
                 <a:close/>
               </a:path>
@@ -3654,12 +3654,10 @@
         <p:spPr>
           <a:xfrm>
             <a:off x="1161391" y="4374407"/>
-            <a:ext cx="1948435" cy="230087"/>
-          </a:xfrm>
-          <a:prstGeom prst="homePlate">
-            <a:avLst>
-              <a:gd name="adj" fmla="val 30000"/>
-            </a:avLst>
+            <a:ext cx="1882696" cy="230087"/>
+          </a:xfrm>
+          <a:prstGeom prst="rect">
+            <a:avLst/>
           </a:prstGeom>
           <a:solidFill>
             <a:srgbClr val="BDE0FF"/>
@@ -3706,13 +3704,11 @@
         </p:nvSpPr>
         <p:spPr>
           <a:xfrm>
-            <a:off x="2978348" y="4374407"/>
-            <a:ext cx="2014174" cy="230087"/>
-          </a:xfrm>
-          <a:prstGeom prst="chevron">
-            <a:avLst>
-              <a:gd name="adj" fmla="val 30000"/>
-            </a:avLst>
+            <a:off x="3044087" y="4374407"/>
+            <a:ext cx="1882696" cy="230087"/>
+          </a:xfrm>
+          <a:prstGeom prst="rect">
+            <a:avLst/>
           </a:prstGeom>
           <a:solidFill>
             <a:srgbClr val="30C2FF"/>
@@ -3759,13 +3755,11 @@
         </p:nvSpPr>
         <p:spPr>
           <a:xfrm>
-            <a:off x="4861043" y="4374407"/>
-            <a:ext cx="1948435" cy="230087"/>
-          </a:xfrm>
-          <a:prstGeom prst="chevron">
-            <a:avLst>
-              <a:gd name="adj" fmla="val 30000"/>
-            </a:avLst>
+            <a:off x="4926783" y="4374407"/>
+            <a:ext cx="1882696" cy="230087"/>
+          </a:xfrm>
+          <a:prstGeom prst="rect">
+            <a:avLst/>
           </a:prstGeom>
           <a:solidFill>
             <a:srgbClr val="0051BC"/>
@@ -3806,7 +3800,103 @@
       </p:sp>
       <p:sp>
         <p:nvSpPr>
-          <p:cNvPr id="46" name="칸 본문"/>
+          <p:cNvPr id="46" name="단계 삼각형"/>
+          <p:cNvSpPr/>
+          <p:nvPr/>
+        </p:nvSpPr>
+        <p:spPr>
+          <a:xfrm>
+            <a:off x="3044086" y="4374406"/>
+            <a:ext cx="109566" cy="230087"/>
+          </a:xfrm>
+          <a:custGeom>
+            <a:avLst/>
+            <a:gdLst/>
+            <a:ahLst/>
+            <a:cxnLst/>
+            <a:rect l="l" t="t" r="r" b="b"/>
+            <a:pathLst>
+              <a:path w="109566" h="230087">
+                <a:moveTo>
+                  <a:pt x="0" y="0"/>
+                </a:moveTo>
+                <a:lnTo>
+                  <a:pt x="109566" y="115044"/>
+                </a:lnTo>
+                <a:lnTo>
+                  <a:pt x="0" y="230087"/>
+                </a:lnTo>
+                <a:close/>
+              </a:path>
+            </a:pathLst>
+          </a:custGeom>
+          <a:solidFill>
+            <a:srgbClr val="BDE0FF"/>
+          </a:solidFill>
+          <a:ln>
+            <a:noFill/>
+          </a:ln>
+          <a:effectLst/>
+        </p:spPr>
+        <p:txBody>
+          <a:bodyPr rtlCol="0" anchor="ctr"/>
+          <a:lstStyle/>
+          <a:p>
+            <a:pPr algn="ctr"/>
+          </a:p>
+        </p:txBody>
+      </p:sp>
+      <p:sp>
+        <p:nvSpPr>
+          <p:cNvPr id="47" name="단계 삼각형"/>
+          <p:cNvSpPr/>
+          <p:nvPr/>
+        </p:nvSpPr>
+        <p:spPr>
+          <a:xfrm>
+            <a:off x="4926782" y="4374406"/>
+            <a:ext cx="109565" cy="230087"/>
+          </a:xfrm>
+          <a:custGeom>
+            <a:avLst/>
+            <a:gdLst/>
+            <a:ahLst/>
+            <a:cxnLst/>
+            <a:rect l="l" t="t" r="r" b="b"/>
+            <a:pathLst>
+              <a:path w="109565" h="230087">
+                <a:moveTo>
+                  <a:pt x="0" y="0"/>
+                </a:moveTo>
+                <a:lnTo>
+                  <a:pt x="109565" y="115044"/>
+                </a:lnTo>
+                <a:lnTo>
+                  <a:pt x="0" y="230087"/>
+                </a:lnTo>
+                <a:close/>
+              </a:path>
+            </a:pathLst>
+          </a:custGeom>
+          <a:solidFill>
+            <a:srgbClr val="30C2FF"/>
+          </a:solidFill>
+          <a:ln>
+            <a:noFill/>
+          </a:ln>
+          <a:effectLst/>
+        </p:spPr>
+        <p:txBody>
+          <a:bodyPr rtlCol="0" anchor="ctr"/>
+          <a:lstStyle/>
+          <a:p>
+            <a:pPr algn="ctr"/>
+          </a:p>
+        </p:txBody>
+      </p:sp>
+      <p:sp>
+        <p:nvSpPr>
+          <p:cNvPr id="48" name="칸 본문"/>
           <p:cNvSpPr txBox="1"/>
           <p:nvPr/>
         </p:nvSpPr>
@@ -3885,7 +3975,7 @@
       </p:sp>
       <p:sp>
         <p:nvSpPr>
-          <p:cNvPr id="47" name="칸 본문"/>
+          <p:cNvPr id="49" name="칸 본문"/>
           <p:cNvSpPr txBox="1"/>
           <p:nvPr/>
         </p:nvSpPr>
@@ -3936,7 +4026,7 @@
       </p:sp>
       <p:cxnSp>
         <p:nvCxnSpPr>
-          <p:cNvPr id="48" name="Connector 47"/>
+          <p:cNvPr id="50" name="Connector 49"/>
           <p:cNvCxnSpPr/>
           <p:nvPr/>
         </p:nvCxnSpPr>
@@ -3957,7 +4047,7 @@
       </p:cxnSp>
       <p:sp>
         <p:nvSpPr>
-          <p:cNvPr id="49" name="칸 본문"/>
+          <p:cNvPr id="51" name="칸 본문"/>
           <p:cNvSpPr txBox="1"/>
           <p:nvPr/>
         </p:nvSpPr>
@@ -4036,7 +4126,7 @@
       </p:sp>
       <p:cxnSp>
         <p:nvCxnSpPr>
-          <p:cNvPr id="50" name="Connector 49"/>
+          <p:cNvPr id="52" name="Connector 51"/>
           <p:cNvCxnSpPr/>
           <p:nvPr/>
         </p:nvCxnSpPr>
@@ -4057,108 +4147,36 @@
       </p:cxnSp>
       <p:sp>
         <p:nvSpPr>
-          <p:cNvPr id="51" name="연결 막대"/>
+          <p:cNvPr id="53" name="삼각 화살표"/>
           <p:cNvSpPr/>
           <p:nvPr/>
         </p:nvSpPr>
         <p:spPr>
           <a:xfrm>
-            <a:off x="1698261" y="5084765"/>
-            <a:ext cx="4601739" cy="32870"/>
-          </a:xfrm>
-          <a:prstGeom prst="rect">
-            <a:avLst/>
-          </a:prstGeom>
-          <a:solidFill>
-            <a:srgbClr val="BDE0FF"/>
-          </a:solidFill>
-          <a:ln>
-            <a:noFill/>
-          </a:ln>
-          <a:effectLst/>
-        </p:spPr>
-        <p:txBody>
-          <a:bodyPr rtlCol="0" anchor="ctr" lIns="0" rIns="0" tIns="0" bIns="0"/>
-          <a:lstStyle/>
-          <a:p>
-            <a:pPr algn="ctr"/>
-          </a:p>
-        </p:txBody>
-      </p:sp>
-      <p:sp>
-        <p:nvSpPr>
-          <p:cNvPr id="52" name="연결 끝"/>
-          <p:cNvSpPr/>
-          <p:nvPr/>
-        </p:nvSpPr>
-        <p:spPr>
-          <a:xfrm>
-            <a:off x="1698261" y="5084765"/>
-            <a:ext cx="27391" cy="76696"/>
-          </a:xfrm>
-          <a:prstGeom prst="rect">
-            <a:avLst/>
-          </a:prstGeom>
-          <a:solidFill>
-            <a:srgbClr val="BDE0FF"/>
-          </a:solidFill>
-          <a:ln>
-            <a:noFill/>
-          </a:ln>
-          <a:effectLst/>
-        </p:spPr>
-        <p:txBody>
-          <a:bodyPr rtlCol="0" anchor="ctr" lIns="0" rIns="0" tIns="0" bIns="0"/>
-          <a:lstStyle/>
-          <a:p>
-            <a:pPr algn="ctr"/>
-          </a:p>
-        </p:txBody>
-      </p:sp>
-      <p:sp>
-        <p:nvSpPr>
-          <p:cNvPr id="53" name="연결 끝"/>
-          <p:cNvSpPr/>
-          <p:nvPr/>
-        </p:nvSpPr>
-        <p:spPr>
-          <a:xfrm>
-            <a:off x="6272609" y="5084765"/>
-            <a:ext cx="27391" cy="76696"/>
-          </a:xfrm>
-          <a:prstGeom prst="rect">
-            <a:avLst/>
-          </a:prstGeom>
-          <a:solidFill>
-            <a:srgbClr val="BDE0FF"/>
-          </a:solidFill>
-          <a:ln>
-            <a:noFill/>
-          </a:ln>
-          <a:effectLst/>
-        </p:spPr>
-        <p:txBody>
-          <a:bodyPr rtlCol="0" anchor="ctr" lIns="0" rIns="0" tIns="0" bIns="0"/>
-          <a:lstStyle/>
-          <a:p>
-            <a:pPr algn="ctr"/>
-          </a:p>
-        </p:txBody>
-      </p:sp>
-      <p:sp>
-        <p:nvSpPr>
-          <p:cNvPr id="54" name="연결 화살표"/>
-          <p:cNvSpPr/>
-          <p:nvPr/>
-        </p:nvSpPr>
-        <p:spPr>
-          <a:xfrm>
-            <a:off x="3889565" y="5101200"/>
-            <a:ext cx="219130" cy="169826"/>
-          </a:xfrm>
-          <a:prstGeom prst="downArrow">
-            <a:avLst/>
-          </a:prstGeom>
+            <a:off x="3823826" y="5101200"/>
+            <a:ext cx="350608" cy="142434"/>
+          </a:xfrm>
+          <a:custGeom>
+            <a:avLst/>
+            <a:gdLst/>
+            <a:ahLst/>
+            <a:cxnLst/>
+            <a:rect l="l" t="t" r="r" b="b"/>
+            <a:pathLst>
+              <a:path w="350608" h="142434">
+                <a:moveTo>
+                  <a:pt x="0" y="0"/>
+                </a:moveTo>
+                <a:lnTo>
+                  <a:pt x="350608" y="0"/>
+                </a:lnTo>
+                <a:lnTo>
+                  <a:pt x="175304" y="142434"/>
+                </a:lnTo>
+                <a:close/>
+              </a:path>
+            </a:pathLst>
+          </a:custGeom>
           <a:solidFill>
             <a:srgbClr val="0051BC"/>
           </a:solidFill>
@@ -4168,7 +4186,7 @@
           <a:effectLst/>
         </p:spPr>
         <p:txBody>
-          <a:bodyPr rtlCol="0" anchor="ctr" lIns="0" rIns="0" tIns="0" bIns="0"/>
+          <a:bodyPr rtlCol="0" anchor="ctr"/>
           <a:lstStyle/>
           <a:p>
             <a:pPr algn="ctr"/>
@@ -4177,7 +4195,7 @@
       </p:sp>
       <p:sp>
         <p:nvSpPr>
-          <p:cNvPr id="55" name="라벨 박스"/>
+          <p:cNvPr id="54" name="라벨 박스"/>
           <p:cNvSpPr/>
           <p:nvPr/>
         </p:nvSpPr>
@@ -4209,7 +4227,7 @@
       </p:sp>
       <p:sp>
         <p:nvSpPr>
-          <p:cNvPr id="56" name="레일"/>
+          <p:cNvPr id="55" name="레일"/>
           <p:cNvSpPr/>
           <p:nvPr/>
         </p:nvSpPr>
@@ -4265,7 +4283,7 @@
       </p:sp>
       <p:sp>
         <p:nvSpPr>
-          <p:cNvPr id="57" name="강조 바"/>
+          <p:cNvPr id="56" name="강조 바"/>
           <p:cNvSpPr/>
           <p:nvPr/>
         </p:nvSpPr>
@@ -4295,7 +4313,7 @@
       </p:sp>
       <p:sp>
         <p:nvSpPr>
-          <p:cNvPr id="58" name="강조 바 글"/>
+          <p:cNvPr id="57" name="강조 바 글"/>
           <p:cNvSpPr txBox="1"/>
           <p:nvPr/>
         </p:nvSpPr>
@@ -4342,7 +4360,7 @@
       </p:sp>
       <p:sp>
         <p:nvSpPr>
-          <p:cNvPr id="59" name="라벨 박스"/>
+          <p:cNvPr id="58" name="라벨 박스"/>
           <p:cNvSpPr/>
           <p:nvPr/>
         </p:nvSpPr>
@@ -4374,7 +4392,7 @@
       </p:sp>
       <p:sp>
         <p:nvSpPr>
-          <p:cNvPr id="60" name="레일"/>
+          <p:cNvPr id="59" name="레일"/>
           <p:cNvSpPr/>
           <p:nvPr/>
         </p:nvSpPr>
@@ -4430,7 +4448,7 @@
       </p:sp>
       <p:sp>
         <p:nvSpPr>
-          <p:cNvPr id="61" name="가운데 글"/>
+          <p:cNvPr id="60" name="가운데 글"/>
           <p:cNvSpPr txBox="1"/>
           <p:nvPr/>
         </p:nvSpPr>
@@ -4477,7 +4495,7 @@
       </p:sp>
       <p:sp>
         <p:nvSpPr>
-          <p:cNvPr id="62" name="가운데 글"/>
+          <p:cNvPr id="61" name="가운데 글"/>
           <p:cNvSpPr txBox="1"/>
           <p:nvPr/>
         </p:nvSpPr>
@@ -4524,7 +4542,7 @@
       </p:sp>
       <p:cxnSp>
         <p:nvCxnSpPr>
-          <p:cNvPr id="63" name="Connector 62"/>
+          <p:cNvPr id="62" name="Connector 61"/>
           <p:cNvCxnSpPr/>
           <p:nvPr/>
         </p:nvCxnSpPr>
@@ -4545,7 +4563,7 @@
       </p:cxnSp>
       <p:sp>
         <p:nvSpPr>
-          <p:cNvPr id="64" name="가운데 글"/>
+          <p:cNvPr id="63" name="가운데 글"/>
           <p:cNvSpPr txBox="1"/>
           <p:nvPr/>
         </p:nvSpPr>
@@ -4592,7 +4610,7 @@
       </p:sp>
       <p:cxnSp>
         <p:nvCxnSpPr>
-          <p:cNvPr id="65" name="Connector 64"/>
+          <p:cNvPr id="64" name="Connector 63"/>
           <p:cNvCxnSpPr/>
           <p:nvPr/>
         </p:nvCxnSpPr>
@@ -4613,7 +4631,7 @@
       </p:cxnSp>
       <p:sp>
         <p:nvSpPr>
-          <p:cNvPr id="66" name="라벨 박스"/>
+          <p:cNvPr id="65" name="라벨 박스"/>
           <p:cNvSpPr/>
           <p:nvPr/>
         </p:nvSpPr>
@@ -4645,7 +4663,7 @@
       </p:sp>
       <p:sp>
         <p:nvSpPr>
-          <p:cNvPr id="67" name="레일"/>
+          <p:cNvPr id="66" name="레일"/>
           <p:cNvSpPr/>
           <p:nvPr/>
         </p:nvSpPr>
@@ -4701,7 +4719,7 @@
       </p:sp>
       <p:sp>
         <p:nvSpPr>
-          <p:cNvPr id="68" name="칸 본문"/>
+          <p:cNvPr id="67" name="칸 본문"/>
           <p:cNvSpPr txBox="1"/>
           <p:nvPr/>
         </p:nvSpPr>
@@ -4808,7 +4826,7 @@
       </p:sp>
       <p:sp>
         <p:nvSpPr>
-          <p:cNvPr id="69" name="칸 본문"/>
+          <p:cNvPr id="68" name="칸 본문"/>
           <p:cNvSpPr txBox="1"/>
           <p:nvPr/>
         </p:nvSpPr>
@@ -4915,7 +4933,7 @@
       </p:sp>
       <p:cxnSp>
         <p:nvCxnSpPr>
-          <p:cNvPr id="70" name="Connector 69"/>
+          <p:cNvPr id="69" name="Connector 68"/>
           <p:cNvCxnSpPr/>
           <p:nvPr/>
         </p:nvCxnSpPr>
@@ -4936,7 +4954,7 @@
       </p:cxnSp>
       <p:sp>
         <p:nvSpPr>
-          <p:cNvPr id="71" name="칸 본문"/>
+          <p:cNvPr id="70" name="칸 본문"/>
           <p:cNvSpPr txBox="1"/>
           <p:nvPr/>
         </p:nvSpPr>
@@ -5043,7 +5061,7 @@
       </p:sp>
       <p:cxnSp>
         <p:nvCxnSpPr>
-          <p:cNvPr id="72" name="Connector 71"/>
+          <p:cNvPr id="71" name="Connector 70"/>
           <p:cNvCxnSpPr/>
           <p:nvPr/>
         </p:nvCxnSpPr>
@@ -5064,7 +5082,7 @@
       </p:cxnSp>
       <p:sp>
         <p:nvSpPr>
-          <p:cNvPr id="73" name="라벨 박스"/>
+          <p:cNvPr id="72" name="라벨 박스"/>
           <p:cNvSpPr/>
           <p:nvPr/>
         </p:nvSpPr>
@@ -5096,7 +5114,7 @@
       </p:sp>
       <p:sp>
         <p:nvSpPr>
-          <p:cNvPr id="74" name="레일"/>
+          <p:cNvPr id="73" name="레일"/>
           <p:cNvSpPr/>
           <p:nvPr/>
         </p:nvSpPr>
@@ -5152,7 +5170,7 @@
       </p:sp>
       <p:sp>
         <p:nvSpPr>
-          <p:cNvPr id="75" name="칸 본문"/>
+          <p:cNvPr id="74" name="칸 본문"/>
           <p:cNvSpPr txBox="1"/>
           <p:nvPr/>
         </p:nvSpPr>
@@ -5231,7 +5249,7 @@
       </p:sp>
       <p:sp>
         <p:nvSpPr>
-          <p:cNvPr id="76" name="칸 본문"/>
+          <p:cNvPr id="75" name="칸 본문"/>
           <p:cNvSpPr txBox="1"/>
           <p:nvPr/>
         </p:nvSpPr>
@@ -5310,7 +5328,7 @@
       </p:sp>
       <p:cxnSp>
         <p:nvCxnSpPr>
-          <p:cNvPr id="77" name="Connector 76"/>
+          <p:cNvPr id="76" name="Connector 75"/>
           <p:cNvCxnSpPr/>
           <p:nvPr/>
         </p:nvCxnSpPr>
@@ -5331,7 +5349,7 @@
       </p:cxnSp>
       <p:sp>
         <p:nvSpPr>
-          <p:cNvPr id="78" name="칸 본문"/>
+          <p:cNvPr id="77" name="칸 본문"/>
           <p:cNvSpPr txBox="1"/>
           <p:nvPr/>
         </p:nvSpPr>
@@ -5410,7 +5428,7 @@
       </p:sp>
       <p:cxnSp>
         <p:nvCxnSpPr>
-          <p:cNvPr id="79" name="Connector 78"/>
+          <p:cNvPr id="78" name="Connector 77"/>
           <p:cNvCxnSpPr/>
           <p:nvPr/>
         </p:nvCxnSpPr>
@@ -5431,7 +5449,7 @@
       </p:cxnSp>
       <p:sp>
         <p:nvSpPr>
-          <p:cNvPr id="80" name="라벨 박스"/>
+          <p:cNvPr id="79" name="라벨 박스"/>
           <p:cNvSpPr/>
           <p:nvPr/>
         </p:nvSpPr>
@@ -5463,7 +5481,7 @@
       </p:sp>
       <p:sp>
         <p:nvSpPr>
-          <p:cNvPr id="81" name="레일"/>
+          <p:cNvPr id="80" name="레일"/>
           <p:cNvSpPr/>
           <p:nvPr/>
         </p:nvSpPr>
@@ -5519,7 +5537,7 @@
       </p:sp>
       <p:sp>
         <p:nvSpPr>
-          <p:cNvPr id="82" name="칸 본문"/>
+          <p:cNvPr id="81" name="칸 본문"/>
           <p:cNvSpPr txBox="1"/>
           <p:nvPr/>
         </p:nvSpPr>
@@ -5598,7 +5616,7 @@
       </p:sp>
       <p:sp>
         <p:nvSpPr>
-          <p:cNvPr id="83" name="칸 본문"/>
+          <p:cNvPr id="82" name="칸 본문"/>
           <p:cNvSpPr txBox="1"/>
           <p:nvPr/>
         </p:nvSpPr>
@@ -5677,7 +5695,7 @@
       </p:sp>
       <p:cxnSp>
         <p:nvCxnSpPr>
-          <p:cNvPr id="84" name="Connector 83"/>
+          <p:cNvPr id="83" name="Connector 82"/>
           <p:cNvCxnSpPr/>
           <p:nvPr/>
         </p:nvCxnSpPr>
@@ -5698,7 +5716,7 @@
       </p:cxnSp>
       <p:sp>
         <p:nvSpPr>
-          <p:cNvPr id="85" name="칸 본문"/>
+          <p:cNvPr id="84" name="칸 본문"/>
           <p:cNvSpPr txBox="1"/>
           <p:nvPr/>
         </p:nvSpPr>
@@ -5777,7 +5795,7 @@
       </p:sp>
       <p:cxnSp>
         <p:nvCxnSpPr>
-          <p:cNvPr id="86" name="Connector 85"/>
+          <p:cNvPr id="85" name="Connector 84"/>
           <p:cNvCxnSpPr/>
           <p:nvPr/>
         </p:nvCxnSpPr>
@@ -5798,7 +5816,7 @@
       </p:cxnSp>
       <p:sp>
         <p:nvSpPr>
-          <p:cNvPr id="87" name="형광 밑줄"/>
+          <p:cNvPr id="86" name="형광 밑줄"/>
           <p:cNvSpPr/>
           <p:nvPr/>
         </p:nvSpPr>
@@ -5828,7 +5846,7 @@
       </p:sp>
       <p:sp>
         <p:nvSpPr>
-          <p:cNvPr id="88" name="소제목"/>
+          <p:cNvPr id="87" name="소제목"/>
           <p:cNvSpPr txBox="1"/>
           <p:nvPr/>
         </p:nvSpPr>
@@ -5875,7 +5893,7 @@
       </p:sp>
       <p:sp>
         <p:nvSpPr>
-          <p:cNvPr id="89" name="태그칩"/>
+          <p:cNvPr id="88" name="태그칩"/>
           <p:cNvSpPr/>
           <p:nvPr/>
         </p:nvSpPr>
@@ -5926,7 +5944,7 @@
       </p:sp>
       <p:sp>
         <p:nvSpPr>
-          <p:cNvPr id="90" name="패널 외곽"/>
+          <p:cNvPr id="89" name="패널 외곽"/>
           <p:cNvSpPr/>
           <p:nvPr/>
         </p:nvSpPr>
@@ -5958,7 +5976,7 @@
       </p:sp>
       <p:sp>
         <p:nvSpPr>
-          <p:cNvPr id="91" name="패널 머리"/>
+          <p:cNvPr id="90" name="패널 머리"/>
           <p:cNvSpPr/>
           <p:nvPr/>
         </p:nvSpPr>
@@ -6009,7 +6027,7 @@
       </p:sp>
       <p:sp>
         <p:nvSpPr>
-          <p:cNvPr id="92" name="레일"/>
+          <p:cNvPr id="91" name="레일"/>
           <p:cNvSpPr/>
           <p:nvPr/>
         </p:nvSpPr>
@@ -6065,7 +6083,7 @@
       </p:sp>
       <p:sp>
         <p:nvSpPr>
-          <p:cNvPr id="93" name="패널 본문"/>
+          <p:cNvPr id="92" name="패널 본문"/>
           <p:cNvSpPr txBox="1"/>
           <p:nvPr/>
         </p:nvSpPr>
@@ -6144,7 +6162,7 @@
       </p:sp>
       <p:cxnSp>
         <p:nvCxnSpPr>
-          <p:cNvPr id="94" name="Connector 93"/>
+          <p:cNvPr id="93" name="Connector 92"/>
           <p:cNvCxnSpPr/>
           <p:nvPr/>
         </p:nvCxnSpPr>
@@ -6165,7 +6183,7 @@
       </p:cxnSp>
       <p:sp>
         <p:nvSpPr>
-          <p:cNvPr id="95" name="레일"/>
+          <p:cNvPr id="94" name="레일"/>
           <p:cNvSpPr/>
           <p:nvPr/>
         </p:nvSpPr>
@@ -6245,7 +6263,7 @@
       </p:sp>
       <p:sp>
         <p:nvSpPr>
-          <p:cNvPr id="96" name="패널 본문"/>
+          <p:cNvPr id="95" name="패널 본문"/>
           <p:cNvSpPr txBox="1"/>
           <p:nvPr/>
         </p:nvSpPr>
@@ -6324,7 +6342,7 @@
       </p:sp>
       <p:cxnSp>
         <p:nvCxnSpPr>
-          <p:cNvPr id="97" name="Connector 96"/>
+          <p:cNvPr id="96" name="Connector 95"/>
           <p:cNvCxnSpPr/>
           <p:nvPr/>
         </p:nvCxnSpPr>
@@ -6345,7 +6363,7 @@
       </p:cxnSp>
       <p:sp>
         <p:nvSpPr>
-          <p:cNvPr id="98" name="레일"/>
+          <p:cNvPr id="97" name="레일"/>
           <p:cNvSpPr/>
           <p:nvPr/>
         </p:nvSpPr>
@@ -6425,7 +6443,7 @@
       </p:sp>
       <p:sp>
         <p:nvSpPr>
-          <p:cNvPr id="99" name="패널 본문"/>
+          <p:cNvPr id="98" name="패널 본문"/>
           <p:cNvSpPr txBox="1"/>
           <p:nvPr/>
         </p:nvSpPr>
@@ -6504,7 +6522,7 @@
       </p:sp>
       <p:sp>
         <p:nvSpPr>
-          <p:cNvPr id="100" name="패널 외곽"/>
+          <p:cNvPr id="99" name="패널 외곽"/>
           <p:cNvSpPr/>
           <p:nvPr/>
         </p:nvSpPr>
@@ -6536,7 +6554,7 @@
       </p:sp>
       <p:sp>
         <p:nvSpPr>
-          <p:cNvPr id="101" name="패널 머리"/>
+          <p:cNvPr id="100" name="패널 머리"/>
           <p:cNvSpPr/>
           <p:nvPr/>
         </p:nvSpPr>
@@ -6587,7 +6605,7 @@
       </p:sp>
       <p:sp>
         <p:nvSpPr>
-          <p:cNvPr id="102" name="레일"/>
+          <p:cNvPr id="101" name="레일"/>
           <p:cNvSpPr/>
           <p:nvPr/>
         </p:nvSpPr>
@@ -6667,7 +6685,7 @@
       </p:sp>
       <p:sp>
         <p:nvSpPr>
-          <p:cNvPr id="103" name="패널 본문"/>
+          <p:cNvPr id="102" name="패널 본문"/>
           <p:cNvSpPr txBox="1"/>
           <p:nvPr/>
         </p:nvSpPr>
@@ -6746,7 +6764,7 @@
       </p:sp>
       <p:cxnSp>
         <p:nvCxnSpPr>
-          <p:cNvPr id="104" name="Connector 103"/>
+          <p:cNvPr id="103" name="Connector 102"/>
           <p:cNvCxnSpPr/>
           <p:nvPr/>
         </p:nvCxnSpPr>
@@ -6767,7 +6785,7 @@
       </p:cxnSp>
       <p:sp>
         <p:nvSpPr>
-          <p:cNvPr id="105" name="레일"/>
+          <p:cNvPr id="104" name="레일"/>
           <p:cNvSpPr/>
           <p:nvPr/>
         </p:nvSpPr>
@@ -6847,7 +6865,7 @@
       </p:sp>
       <p:sp>
         <p:nvSpPr>
-          <p:cNvPr id="106" name="패널 본문"/>
+          <p:cNvPr id="105" name="패널 본문"/>
           <p:cNvSpPr txBox="1"/>
           <p:nvPr/>
         </p:nvSpPr>
@@ -6926,7 +6944,7 @@
       </p:sp>
       <p:cxnSp>
         <p:nvCxnSpPr>
-          <p:cNvPr id="107" name="Connector 106"/>
+          <p:cNvPr id="106" name="Connector 105"/>
           <p:cNvCxnSpPr/>
           <p:nvPr/>
         </p:nvCxnSpPr>
@@ -6947,7 +6965,7 @@
       </p:cxnSp>
       <p:sp>
         <p:nvSpPr>
-          <p:cNvPr id="108" name="레일"/>
+          <p:cNvPr id="107" name="레일"/>
           <p:cNvSpPr/>
           <p:nvPr/>
         </p:nvSpPr>
@@ -7027,7 +7045,7 @@
       </p:sp>
       <p:sp>
         <p:nvSpPr>
-          <p:cNvPr id="109" name="패널 본문"/>
+          <p:cNvPr id="108" name="패널 본문"/>
           <p:cNvSpPr txBox="1"/>
           <p:nvPr/>
         </p:nvSpPr>
@@ -8773,12 +8791,10 @@
         <p:spPr>
           <a:xfrm>
             <a:off x="1347652" y="4101558"/>
-            <a:ext cx="1081957" cy="230087"/>
-          </a:xfrm>
-          <a:prstGeom prst="homePlate">
-            <a:avLst>
-              <a:gd name="adj" fmla="val 30000"/>
-            </a:avLst>
+            <a:ext cx="1016217" cy="230087"/>
+          </a:xfrm>
+          <a:prstGeom prst="rect">
+            <a:avLst/>
           </a:prstGeom>
           <a:solidFill>
             <a:srgbClr val="DEEEFF"/>
@@ -8825,13 +8841,11 @@
         </p:nvSpPr>
         <p:spPr>
           <a:xfrm>
-            <a:off x="2298130" y="4101558"/>
-            <a:ext cx="1147696" cy="230087"/>
-          </a:xfrm>
-          <a:prstGeom prst="chevron">
-            <a:avLst>
-              <a:gd name="adj" fmla="val 30000"/>
-            </a:avLst>
+            <a:off x="2363870" y="4101558"/>
+            <a:ext cx="1016217" cy="230087"/>
+          </a:xfrm>
+          <a:prstGeom prst="rect">
+            <a:avLst/>
           </a:prstGeom>
           <a:solidFill>
             <a:srgbClr val="BDE0FF"/>
@@ -8878,13 +8892,11 @@
         </p:nvSpPr>
         <p:spPr>
           <a:xfrm>
-            <a:off x="3314348" y="4101558"/>
-            <a:ext cx="1147696" cy="230087"/>
-          </a:xfrm>
-          <a:prstGeom prst="chevron">
-            <a:avLst>
-              <a:gd name="adj" fmla="val 30000"/>
-            </a:avLst>
+            <a:off x="3380087" y="4101558"/>
+            <a:ext cx="1016217" cy="230087"/>
+          </a:xfrm>
+          <a:prstGeom prst="rect">
+            <a:avLst/>
           </a:prstGeom>
           <a:solidFill>
             <a:srgbClr val="30C2FF"/>
@@ -8931,13 +8943,11 @@
         </p:nvSpPr>
         <p:spPr>
           <a:xfrm>
-            <a:off x="4330565" y="4101558"/>
-            <a:ext cx="1081957" cy="230087"/>
-          </a:xfrm>
-          <a:prstGeom prst="chevron">
-            <a:avLst>
-              <a:gd name="adj" fmla="val 30000"/>
-            </a:avLst>
+            <a:off x="4396304" y="4101558"/>
+            <a:ext cx="1016217" cy="230087"/>
+          </a:xfrm>
+          <a:prstGeom prst="rect">
+            <a:avLst/>
           </a:prstGeom>
           <a:solidFill>
             <a:srgbClr val="0051BC"/>
@@ -8978,7 +8988,151 @@
       </p:sp>
       <p:sp>
         <p:nvSpPr>
-          <p:cNvPr id="37" name="칸 본문"/>
+          <p:cNvPr id="37" name="단계 삼각형"/>
+          <p:cNvSpPr/>
+          <p:nvPr/>
+        </p:nvSpPr>
+        <p:spPr>
+          <a:xfrm>
+            <a:off x="2363869" y="4101558"/>
+            <a:ext cx="109565" cy="230087"/>
+          </a:xfrm>
+          <a:custGeom>
+            <a:avLst/>
+            <a:gdLst/>
+            <a:ahLst/>
+            <a:cxnLst/>
+            <a:rect l="l" t="t" r="r" b="b"/>
+            <a:pathLst>
+              <a:path w="109565" h="230087">
+                <a:moveTo>
+                  <a:pt x="0" y="0"/>
+                </a:moveTo>
+                <a:lnTo>
+                  <a:pt x="109565" y="115043"/>
+                </a:lnTo>
+                <a:lnTo>
+                  <a:pt x="0" y="230087"/>
+                </a:lnTo>
+                <a:close/>
+              </a:path>
+            </a:pathLst>
+          </a:custGeom>
+          <a:solidFill>
+            <a:srgbClr val="DEEEFF"/>
+          </a:solidFill>
+          <a:ln>
+            <a:noFill/>
+          </a:ln>
+          <a:effectLst/>
+        </p:spPr>
+        <p:txBody>
+          <a:bodyPr rtlCol="0" anchor="ctr"/>
+          <a:lstStyle/>
+          <a:p>
+            <a:pPr algn="ctr"/>
+          </a:p>
+        </p:txBody>
+      </p:sp>
+      <p:sp>
+        <p:nvSpPr>
+          <p:cNvPr id="38" name="단계 삼각형"/>
+          <p:cNvSpPr/>
+          <p:nvPr/>
+        </p:nvSpPr>
+        <p:spPr>
+          <a:xfrm>
+            <a:off x="3380086" y="4101558"/>
+            <a:ext cx="109566" cy="230087"/>
+          </a:xfrm>
+          <a:custGeom>
+            <a:avLst/>
+            <a:gdLst/>
+            <a:ahLst/>
+            <a:cxnLst/>
+            <a:rect l="l" t="t" r="r" b="b"/>
+            <a:pathLst>
+              <a:path w="109566" h="230087">
+                <a:moveTo>
+                  <a:pt x="0" y="0"/>
+                </a:moveTo>
+                <a:lnTo>
+                  <a:pt x="109566" y="115043"/>
+                </a:lnTo>
+                <a:lnTo>
+                  <a:pt x="0" y="230087"/>
+                </a:lnTo>
+                <a:close/>
+              </a:path>
+            </a:pathLst>
+          </a:custGeom>
+          <a:solidFill>
+            <a:srgbClr val="BDE0FF"/>
+          </a:solidFill>
+          <a:ln>
+            <a:noFill/>
+          </a:ln>
+          <a:effectLst/>
+        </p:spPr>
+        <p:txBody>
+          <a:bodyPr rtlCol="0" anchor="ctr"/>
+          <a:lstStyle/>
+          <a:p>
+            <a:pPr algn="ctr"/>
+          </a:p>
+        </p:txBody>
+      </p:sp>
+      <p:sp>
+        <p:nvSpPr>
+          <p:cNvPr id="39" name="단계 삼각형"/>
+          <p:cNvSpPr/>
+          <p:nvPr/>
+        </p:nvSpPr>
+        <p:spPr>
+          <a:xfrm>
+            <a:off x="4396304" y="4101558"/>
+            <a:ext cx="109565" cy="230087"/>
+          </a:xfrm>
+          <a:custGeom>
+            <a:avLst/>
+            <a:gdLst/>
+            <a:ahLst/>
+            <a:cxnLst/>
+            <a:rect l="l" t="t" r="r" b="b"/>
+            <a:pathLst>
+              <a:path w="109565" h="230087">
+                <a:moveTo>
+                  <a:pt x="0" y="0"/>
+                </a:moveTo>
+                <a:lnTo>
+                  <a:pt x="109565" y="115043"/>
+                </a:lnTo>
+                <a:lnTo>
+                  <a:pt x="0" y="230087"/>
+                </a:lnTo>
+                <a:close/>
+              </a:path>
+            </a:pathLst>
+          </a:custGeom>
+          <a:solidFill>
+            <a:srgbClr val="30C2FF"/>
+          </a:solidFill>
+          <a:ln>
+            <a:noFill/>
+          </a:ln>
+          <a:effectLst/>
+        </p:spPr>
+        <p:txBody>
+          <a:bodyPr rtlCol="0" anchor="ctr"/>
+          <a:lstStyle/>
+          <a:p>
+            <a:pPr algn="ctr"/>
+          </a:p>
+        </p:txBody>
+      </p:sp>
+      <p:sp>
+        <p:nvSpPr>
+          <p:cNvPr id="40" name="칸 본문"/>
           <p:cNvSpPr txBox="1"/>
           <p:nvPr/>
         </p:nvSpPr>
@@ -9029,7 +9183,7 @@
       </p:sp>
       <p:sp>
         <p:nvSpPr>
-          <p:cNvPr id="38" name="칸 본문"/>
+          <p:cNvPr id="41" name="칸 본문"/>
           <p:cNvSpPr txBox="1"/>
           <p:nvPr/>
         </p:nvSpPr>
@@ -9080,7 +9234,7 @@
       </p:sp>
       <p:cxnSp>
         <p:nvCxnSpPr>
-          <p:cNvPr id="39" name="Connector 38"/>
+          <p:cNvPr id="42" name="Connector 41"/>
           <p:cNvCxnSpPr/>
           <p:nvPr/>
         </p:nvCxnSpPr>
@@ -9101,7 +9255,7 @@
       </p:cxnSp>
       <p:sp>
         <p:nvSpPr>
-          <p:cNvPr id="40" name="칸 본문"/>
+          <p:cNvPr id="43" name="칸 본문"/>
           <p:cNvSpPr txBox="1"/>
           <p:nvPr/>
         </p:nvSpPr>
@@ -9152,7 +9306,7 @@
       </p:sp>
       <p:cxnSp>
         <p:nvCxnSpPr>
-          <p:cNvPr id="41" name="Connector 40"/>
+          <p:cNvPr id="44" name="Connector 43"/>
           <p:cNvCxnSpPr/>
           <p:nvPr/>
         </p:nvCxnSpPr>
@@ -9173,7 +9327,7 @@
       </p:cxnSp>
       <p:sp>
         <p:nvSpPr>
-          <p:cNvPr id="42" name="칸 본문"/>
+          <p:cNvPr id="45" name="칸 본문"/>
           <p:cNvSpPr txBox="1"/>
           <p:nvPr/>
         </p:nvSpPr>
@@ -9224,7 +9378,7 @@
       </p:sp>
       <p:cxnSp>
         <p:nvCxnSpPr>
-          <p:cNvPr id="43" name="Connector 42"/>
+          <p:cNvPr id="46" name="Connector 45"/>
           <p:cNvCxnSpPr/>
           <p:nvPr/>
         </p:nvCxnSpPr>
@@ -9245,18 +9399,36 @@
       </p:cxnSp>
       <p:sp>
         <p:nvSpPr>
-          <p:cNvPr id="44" name="성과 화살표"/>
+          <p:cNvPr id="47" name="성과 화살표"/>
           <p:cNvSpPr/>
           <p:nvPr/>
         </p:nvSpPr>
         <p:spPr>
           <a:xfrm>
-            <a:off x="5461826" y="3724466"/>
-            <a:ext cx="153391" cy="241043"/>
-          </a:xfrm>
-          <a:prstGeom prst="rightArrow">
-            <a:avLst/>
-          </a:prstGeom>
+            <a:off x="5467304" y="3702553"/>
+            <a:ext cx="142435" cy="284869"/>
+          </a:xfrm>
+          <a:custGeom>
+            <a:avLst/>
+            <a:gdLst/>
+            <a:ahLst/>
+            <a:cxnLst/>
+            <a:rect l="l" t="t" r="r" b="b"/>
+            <a:pathLst>
+              <a:path w="142435" h="284869">
+                <a:moveTo>
+                  <a:pt x="0" y="0"/>
+                </a:moveTo>
+                <a:lnTo>
+                  <a:pt x="0" y="284869"/>
+                </a:lnTo>
+                <a:lnTo>
+                  <a:pt x="142435" y="142434"/>
+                </a:lnTo>
+                <a:close/>
+              </a:path>
+            </a:pathLst>
+          </a:custGeom>
           <a:solidFill>
             <a:srgbClr val="0051BC"/>
           </a:solidFill>
@@ -9266,7 +9438,7 @@
           <a:effectLst/>
         </p:spPr>
         <p:txBody>
-          <a:bodyPr rtlCol="0" anchor="ctr" lIns="0" rIns="0" tIns="0" bIns="0"/>
+          <a:bodyPr rtlCol="0" anchor="ctr"/>
           <a:lstStyle/>
           <a:p>
             <a:pPr algn="ctr"/>
@@ -9275,7 +9447,7 @@
       </p:sp>
       <p:sp>
         <p:nvSpPr>
-          <p:cNvPr id="45" name="성과 패널 머리"/>
+          <p:cNvPr id="48" name="성과 패널 머리"/>
           <p:cNvSpPr/>
           <p:nvPr/>
         </p:nvSpPr>
@@ -9326,7 +9498,7 @@
       </p:sp>
       <p:sp>
         <p:nvSpPr>
-          <p:cNvPr id="46" name="성과 패널"/>
+          <p:cNvPr id="49" name="성과 패널"/>
           <p:cNvSpPr/>
           <p:nvPr/>
         </p:nvSpPr>
@@ -9358,7 +9530,7 @@
       </p:sp>
       <p:sp>
         <p:nvSpPr>
-          <p:cNvPr id="47" name="성과 패널 본문"/>
+          <p:cNvPr id="50" name="성과 패널 본문"/>
           <p:cNvSpPr txBox="1"/>
           <p:nvPr/>
         </p:nvSpPr>
@@ -9465,7 +9637,7 @@
       </p:sp>
       <p:sp>
         <p:nvSpPr>
-          <p:cNvPr id="48" name="형광 밑줄"/>
+          <p:cNvPr id="51" name="형광 밑줄"/>
           <p:cNvSpPr/>
           <p:nvPr/>
         </p:nvSpPr>
@@ -9495,7 +9667,7 @@
       </p:sp>
       <p:sp>
         <p:nvSpPr>
-          <p:cNvPr id="49" name="소제목"/>
+          <p:cNvPr id="52" name="소제목"/>
           <p:cNvSpPr txBox="1"/>
           <p:nvPr/>
         </p:nvSpPr>
@@ -9542,7 +9714,7 @@
       </p:sp>
       <p:sp>
         <p:nvSpPr>
-          <p:cNvPr id="50" name="태그칩"/>
+          <p:cNvPr id="53" name="태그칩"/>
           <p:cNvSpPr/>
           <p:nvPr/>
         </p:nvSpPr>
@@ -9593,7 +9765,7 @@
       </p:sp>
       <p:sp>
         <p:nvSpPr>
-          <p:cNvPr id="51" name="표 외곽"/>
+          <p:cNvPr id="54" name="표 외곽"/>
           <p:cNvSpPr/>
           <p:nvPr/>
         </p:nvSpPr>
@@ -9625,7 +9797,7 @@
       </p:sp>
       <p:sp>
         <p:nvSpPr>
-          <p:cNvPr id="52" name="레일"/>
+          <p:cNvPr id="55" name="레일"/>
           <p:cNvSpPr/>
           <p:nvPr/>
         </p:nvSpPr>
@@ -9705,7 +9877,7 @@
       </p:sp>
       <p:sp>
         <p:nvSpPr>
-          <p:cNvPr id="53" name="머리칸"/>
+          <p:cNvPr id="56" name="머리칸"/>
           <p:cNvSpPr/>
           <p:nvPr/>
         </p:nvSpPr>
@@ -9756,7 +9928,7 @@
       </p:sp>
       <p:sp>
         <p:nvSpPr>
-          <p:cNvPr id="54" name="머리칸"/>
+          <p:cNvPr id="57" name="머리칸"/>
           <p:cNvSpPr/>
           <p:nvPr/>
         </p:nvSpPr>
@@ -9807,7 +9979,7 @@
       </p:sp>
       <p:sp>
         <p:nvSpPr>
-          <p:cNvPr id="55" name="칸 본문"/>
+          <p:cNvPr id="58" name="칸 본문"/>
           <p:cNvSpPr txBox="1"/>
           <p:nvPr/>
         </p:nvSpPr>
@@ -9858,7 +10030,7 @@
       </p:sp>
       <p:sp>
         <p:nvSpPr>
-          <p:cNvPr id="56" name="칸 본문"/>
+          <p:cNvPr id="59" name="칸 본문"/>
           <p:cNvSpPr txBox="1"/>
           <p:nvPr/>
         </p:nvSpPr>
@@ -9909,7 +10081,7 @@
       </p:sp>
       <p:cxnSp>
         <p:nvCxnSpPr>
-          <p:cNvPr id="57" name="Connector 56"/>
+          <p:cNvPr id="60" name="Connector 59"/>
           <p:cNvCxnSpPr/>
           <p:nvPr/>
         </p:nvCxnSpPr>
@@ -9930,7 +10102,7 @@
       </p:cxnSp>
       <p:sp>
         <p:nvSpPr>
-          <p:cNvPr id="58" name="레일"/>
+          <p:cNvPr id="61" name="레일"/>
           <p:cNvSpPr/>
           <p:nvPr/>
         </p:nvSpPr>
@@ -10010,7 +10182,7 @@
       </p:sp>
       <p:sp>
         <p:nvSpPr>
-          <p:cNvPr id="59" name="머리칸"/>
+          <p:cNvPr id="62" name="머리칸"/>
           <p:cNvSpPr/>
           <p:nvPr/>
         </p:nvSpPr>
@@ -10061,7 +10233,7 @@
       </p:sp>
       <p:sp>
         <p:nvSpPr>
-          <p:cNvPr id="60" name="머리칸"/>
+          <p:cNvPr id="63" name="머리칸"/>
           <p:cNvSpPr/>
           <p:nvPr/>
         </p:nvSpPr>
@@ -10112,7 +10284,7 @@
       </p:sp>
       <p:sp>
         <p:nvSpPr>
-          <p:cNvPr id="61" name="칸 본문"/>
+          <p:cNvPr id="64" name="칸 본문"/>
           <p:cNvSpPr txBox="1"/>
           <p:nvPr/>
         </p:nvSpPr>
@@ -10163,7 +10335,7 @@
       </p:sp>
       <p:sp>
         <p:nvSpPr>
-          <p:cNvPr id="62" name="칸 본문"/>
+          <p:cNvPr id="65" name="칸 본문"/>
           <p:cNvSpPr txBox="1"/>
           <p:nvPr/>
         </p:nvSpPr>
@@ -10214,7 +10386,7 @@
       </p:sp>
       <p:cxnSp>
         <p:nvCxnSpPr>
-          <p:cNvPr id="63" name="Connector 62"/>
+          <p:cNvPr id="66" name="Connector 65"/>
           <p:cNvCxnSpPr/>
           <p:nvPr/>
         </p:nvCxnSpPr>
@@ -10235,7 +10407,7 @@
       </p:cxnSp>
       <p:sp>
         <p:nvSpPr>
-          <p:cNvPr id="64" name="레일"/>
+          <p:cNvPr id="67" name="레일"/>
           <p:cNvSpPr/>
           <p:nvPr/>
         </p:nvSpPr>
@@ -10315,19 +10487,17 @@
       </p:sp>
       <p:sp>
         <p:nvSpPr>
-          <p:cNvPr id="65" name="단계"/>
+          <p:cNvPr id="68" name="단계"/>
           <p:cNvSpPr/>
           <p:nvPr/>
         </p:nvSpPr>
         <p:spPr>
           <a:xfrm>
             <a:off x="1347652" y="6746682"/>
-            <a:ext cx="1477761" cy="230087"/>
-          </a:xfrm>
-          <a:prstGeom prst="homePlate">
-            <a:avLst>
-              <a:gd name="adj" fmla="val 30000"/>
-            </a:avLst>
+            <a:ext cx="1412022" cy="230087"/>
+          </a:xfrm>
+          <a:prstGeom prst="rect">
+            <a:avLst/>
           </a:prstGeom>
           <a:solidFill>
             <a:srgbClr val="DEEEFF"/>
@@ -10368,19 +10538,17 @@
       </p:sp>
       <p:sp>
         <p:nvSpPr>
-          <p:cNvPr id="66" name="단계"/>
+          <p:cNvPr id="69" name="단계"/>
           <p:cNvSpPr/>
           <p:nvPr/>
         </p:nvSpPr>
         <p:spPr>
           <a:xfrm>
-            <a:off x="2693935" y="6746682"/>
-            <a:ext cx="1543500" cy="230087"/>
-          </a:xfrm>
-          <a:prstGeom prst="chevron">
-            <a:avLst>
-              <a:gd name="adj" fmla="val 30000"/>
-            </a:avLst>
+            <a:off x="2759674" y="6746682"/>
+            <a:ext cx="1412022" cy="230087"/>
+          </a:xfrm>
+          <a:prstGeom prst="rect">
+            <a:avLst/>
           </a:prstGeom>
           <a:solidFill>
             <a:srgbClr val="BDE0FF"/>
@@ -10421,19 +10589,17 @@
       </p:sp>
       <p:sp>
         <p:nvSpPr>
-          <p:cNvPr id="67" name="단계"/>
+          <p:cNvPr id="70" name="단계"/>
           <p:cNvSpPr/>
           <p:nvPr/>
         </p:nvSpPr>
         <p:spPr>
           <a:xfrm>
-            <a:off x="4105957" y="6746682"/>
-            <a:ext cx="1543500" cy="230087"/>
-          </a:xfrm>
-          <a:prstGeom prst="chevron">
-            <a:avLst>
-              <a:gd name="adj" fmla="val 30000"/>
-            </a:avLst>
+            <a:off x="4171696" y="6746682"/>
+            <a:ext cx="1412022" cy="230087"/>
+          </a:xfrm>
+          <a:prstGeom prst="rect">
+            <a:avLst/>
           </a:prstGeom>
           <a:solidFill>
             <a:srgbClr val="30C2FF"/>
@@ -10474,19 +10640,17 @@
       </p:sp>
       <p:sp>
         <p:nvSpPr>
-          <p:cNvPr id="68" name="단계"/>
+          <p:cNvPr id="71" name="단계"/>
           <p:cNvSpPr/>
           <p:nvPr/>
         </p:nvSpPr>
         <p:spPr>
           <a:xfrm>
-            <a:off x="5517978" y="6746682"/>
-            <a:ext cx="1477761" cy="230087"/>
-          </a:xfrm>
-          <a:prstGeom prst="chevron">
-            <a:avLst>
-              <a:gd name="adj" fmla="val 30000"/>
-            </a:avLst>
+            <a:off x="5583717" y="6746682"/>
+            <a:ext cx="1412022" cy="230087"/>
+          </a:xfrm>
+          <a:prstGeom prst="rect">
+            <a:avLst/>
           </a:prstGeom>
           <a:solidFill>
             <a:srgbClr val="0051BC"/>
@@ -10527,7 +10691,151 @@
       </p:sp>
       <p:sp>
         <p:nvSpPr>
-          <p:cNvPr id="69" name="칸 본문"/>
+          <p:cNvPr id="72" name="단계 삼각형"/>
+          <p:cNvSpPr/>
+          <p:nvPr/>
+        </p:nvSpPr>
+        <p:spPr>
+          <a:xfrm>
+            <a:off x="2759673" y="6746681"/>
+            <a:ext cx="109566" cy="230087"/>
+          </a:xfrm>
+          <a:custGeom>
+            <a:avLst/>
+            <a:gdLst/>
+            <a:ahLst/>
+            <a:cxnLst/>
+            <a:rect l="l" t="t" r="r" b="b"/>
+            <a:pathLst>
+              <a:path w="109566" h="230087">
+                <a:moveTo>
+                  <a:pt x="0" y="0"/>
+                </a:moveTo>
+                <a:lnTo>
+                  <a:pt x="109566" y="115044"/>
+                </a:lnTo>
+                <a:lnTo>
+                  <a:pt x="0" y="230087"/>
+                </a:lnTo>
+                <a:close/>
+              </a:path>
+            </a:pathLst>
+          </a:custGeom>
+          <a:solidFill>
+            <a:srgbClr val="DEEEFF"/>
+          </a:solidFill>
+          <a:ln>
+            <a:noFill/>
+          </a:ln>
+          <a:effectLst/>
+        </p:spPr>
+        <p:txBody>
+          <a:bodyPr rtlCol="0" anchor="ctr"/>
+          <a:lstStyle/>
+          <a:p>
+            <a:pPr algn="ctr"/>
+          </a:p>
+        </p:txBody>
+      </p:sp>
+      <p:sp>
+        <p:nvSpPr>
+          <p:cNvPr id="73" name="단계 삼각형"/>
+          <p:cNvSpPr/>
+          <p:nvPr/>
+        </p:nvSpPr>
+        <p:spPr>
+          <a:xfrm>
+            <a:off x="4171695" y="6746681"/>
+            <a:ext cx="109565" cy="230087"/>
+          </a:xfrm>
+          <a:custGeom>
+            <a:avLst/>
+            <a:gdLst/>
+            <a:ahLst/>
+            <a:cxnLst/>
+            <a:rect l="l" t="t" r="r" b="b"/>
+            <a:pathLst>
+              <a:path w="109565" h="230087">
+                <a:moveTo>
+                  <a:pt x="0" y="0"/>
+                </a:moveTo>
+                <a:lnTo>
+                  <a:pt x="109565" y="115044"/>
+                </a:lnTo>
+                <a:lnTo>
+                  <a:pt x="0" y="230087"/>
+                </a:lnTo>
+                <a:close/>
+              </a:path>
+            </a:pathLst>
+          </a:custGeom>
+          <a:solidFill>
+            <a:srgbClr val="BDE0FF"/>
+          </a:solidFill>
+          <a:ln>
+            <a:noFill/>
+          </a:ln>
+          <a:effectLst/>
+        </p:spPr>
+        <p:txBody>
+          <a:bodyPr rtlCol="0" anchor="ctr"/>
+          <a:lstStyle/>
+          <a:p>
+            <a:pPr algn="ctr"/>
+          </a:p>
+        </p:txBody>
+      </p:sp>
+      <p:sp>
+        <p:nvSpPr>
+          <p:cNvPr id="74" name="단계 삼각형"/>
+          <p:cNvSpPr/>
+          <p:nvPr/>
+        </p:nvSpPr>
+        <p:spPr>
+          <a:xfrm>
+            <a:off x="5583717" y="6746681"/>
+            <a:ext cx="109565" cy="230087"/>
+          </a:xfrm>
+          <a:custGeom>
+            <a:avLst/>
+            <a:gdLst/>
+            <a:ahLst/>
+            <a:cxnLst/>
+            <a:rect l="l" t="t" r="r" b="b"/>
+            <a:pathLst>
+              <a:path w="109565" h="230087">
+                <a:moveTo>
+                  <a:pt x="0" y="0"/>
+                </a:moveTo>
+                <a:lnTo>
+                  <a:pt x="109565" y="115044"/>
+                </a:lnTo>
+                <a:lnTo>
+                  <a:pt x="0" y="230087"/>
+                </a:lnTo>
+                <a:close/>
+              </a:path>
+            </a:pathLst>
+          </a:custGeom>
+          <a:solidFill>
+            <a:srgbClr val="30C2FF"/>
+          </a:solidFill>
+          <a:ln>
+            <a:noFill/>
+          </a:ln>
+          <a:effectLst/>
+        </p:spPr>
+        <p:txBody>
+          <a:bodyPr rtlCol="0" anchor="ctr"/>
+          <a:lstStyle/>
+          <a:p>
+            <a:pPr algn="ctr"/>
+          </a:p>
+        </p:txBody>
+      </p:sp>
+      <p:sp>
+        <p:nvSpPr>
+          <p:cNvPr id="75" name="칸 본문"/>
           <p:cNvSpPr txBox="1"/>
           <p:nvPr/>
         </p:nvSpPr>
@@ -10578,7 +10886,7 @@
       </p:sp>
       <p:sp>
         <p:nvSpPr>
-          <p:cNvPr id="70" name="칸 본문"/>
+          <p:cNvPr id="76" name="칸 본문"/>
           <p:cNvSpPr txBox="1"/>
           <p:nvPr/>
         </p:nvSpPr>
@@ -10629,7 +10937,7 @@
       </p:sp>
       <p:cxnSp>
         <p:nvCxnSpPr>
-          <p:cNvPr id="71" name="Connector 70"/>
+          <p:cNvPr id="77" name="Connector 76"/>
           <p:cNvCxnSpPr/>
           <p:nvPr/>
         </p:nvCxnSpPr>
@@ -10650,7 +10958,7 @@
       </p:cxnSp>
       <p:sp>
         <p:nvSpPr>
-          <p:cNvPr id="72" name="칸 본문"/>
+          <p:cNvPr id="78" name="칸 본문"/>
           <p:cNvSpPr txBox="1"/>
           <p:nvPr/>
         </p:nvSpPr>
@@ -10701,7 +11009,7 @@
       </p:sp>
       <p:cxnSp>
         <p:nvCxnSpPr>
-          <p:cNvPr id="73" name="Connector 72"/>
+          <p:cNvPr id="79" name="Connector 78"/>
           <p:cNvCxnSpPr/>
           <p:nvPr/>
         </p:nvCxnSpPr>
@@ -10722,7 +11030,7 @@
       </p:cxnSp>
       <p:sp>
         <p:nvSpPr>
-          <p:cNvPr id="74" name="칸 본문"/>
+          <p:cNvPr id="80" name="칸 본문"/>
           <p:cNvSpPr txBox="1"/>
           <p:nvPr/>
         </p:nvSpPr>
@@ -10773,7 +11081,7 @@
       </p:sp>
       <p:cxnSp>
         <p:nvCxnSpPr>
-          <p:cNvPr id="75" name="Connector 74"/>
+          <p:cNvPr id="81" name="Connector 80"/>
           <p:cNvCxnSpPr/>
           <p:nvPr/>
         </p:nvCxnSpPr>
@@ -10794,7 +11102,7 @@
       </p:cxnSp>
       <p:sp>
         <p:nvSpPr>
-          <p:cNvPr id="76" name="핵심성과 박스"/>
+          <p:cNvPr id="82" name="핵심성과 박스"/>
           <p:cNvSpPr/>
           <p:nvPr/>
         </p:nvSpPr>
@@ -10826,7 +11134,7 @@
       </p:sp>
       <p:sp>
         <p:nvSpPr>
-          <p:cNvPr id="77" name="핵심성과 라벨"/>
+          <p:cNvPr id="83" name="핵심성과 라벨"/>
           <p:cNvSpPr/>
           <p:nvPr/>
         </p:nvSpPr>
@@ -10879,7 +11187,7 @@
       </p:sp>
       <p:sp>
         <p:nvSpPr>
-          <p:cNvPr id="78" name="핵심성과 문구"/>
+          <p:cNvPr id="84" name="핵심성과 문구"/>
           <p:cNvSpPr txBox="1"/>
           <p:nvPr/>
         </p:nvSpPr>
@@ -10930,7 +11238,7 @@
       </p:sp>
       <p:sp>
         <p:nvSpPr>
-          <p:cNvPr id="79" name="형광 밑줄"/>
+          <p:cNvPr id="85" name="형광 밑줄"/>
           <p:cNvSpPr/>
           <p:nvPr/>
         </p:nvSpPr>
@@ -10960,7 +11268,7 @@
       </p:sp>
       <p:sp>
         <p:nvSpPr>
-          <p:cNvPr id="80" name="소제목"/>
+          <p:cNvPr id="86" name="소제목"/>
           <p:cNvSpPr txBox="1"/>
           <p:nvPr/>
         </p:nvSpPr>
@@ -11007,7 +11315,7 @@
       </p:sp>
       <p:sp>
         <p:nvSpPr>
-          <p:cNvPr id="81" name="태그칩"/>
+          <p:cNvPr id="87" name="태그칩"/>
           <p:cNvSpPr/>
           <p:nvPr/>
         </p:nvSpPr>
@@ -11058,7 +11366,7 @@
       </p:sp>
       <p:sp>
         <p:nvSpPr>
-          <p:cNvPr id="82" name="라벨 박스"/>
+          <p:cNvPr id="88" name="라벨 박스"/>
           <p:cNvSpPr/>
           <p:nvPr/>
         </p:nvSpPr>
@@ -11090,7 +11398,7 @@
       </p:sp>
       <p:sp>
         <p:nvSpPr>
-          <p:cNvPr id="83" name="레일"/>
+          <p:cNvPr id="89" name="레일"/>
           <p:cNvSpPr/>
           <p:nvPr/>
         </p:nvSpPr>
@@ -11146,7 +11454,7 @@
       </p:sp>
       <p:sp>
         <p:nvSpPr>
-          <p:cNvPr id="84" name="본문"/>
+          <p:cNvPr id="90" name="본문"/>
           <p:cNvSpPr txBox="1"/>
           <p:nvPr/>
         </p:nvSpPr>
@@ -11197,7 +11505,7 @@
       </p:sp>
       <p:sp>
         <p:nvSpPr>
-          <p:cNvPr id="85" name="라벨 박스"/>
+          <p:cNvPr id="91" name="라벨 박스"/>
           <p:cNvSpPr/>
           <p:nvPr/>
         </p:nvSpPr>
@@ -11229,7 +11537,7 @@
       </p:sp>
       <p:sp>
         <p:nvSpPr>
-          <p:cNvPr id="86" name="레일"/>
+          <p:cNvPr id="92" name="레일"/>
           <p:cNvSpPr/>
           <p:nvPr/>
         </p:nvSpPr>
@@ -11285,7 +11593,7 @@
       </p:sp>
       <p:sp>
         <p:nvSpPr>
-          <p:cNvPr id="87" name="가운데 글"/>
+          <p:cNvPr id="93" name="가운데 글"/>
           <p:cNvSpPr txBox="1"/>
           <p:nvPr/>
         </p:nvSpPr>
@@ -11332,7 +11640,7 @@
       </p:sp>
       <p:sp>
         <p:nvSpPr>
-          <p:cNvPr id="88" name="주석"/>
+          <p:cNvPr id="94" name="주석"/>
           <p:cNvSpPr txBox="1"/>
           <p:nvPr/>
         </p:nvSpPr>
@@ -13382,14 +13690,14 @@
       </p:sp>
       <p:sp>
         <p:nvSpPr>
-          <p:cNvPr id="47" name="레일 쐐기"/>
+          <p:cNvPr id="47" name="레일 삼각형"/>
           <p:cNvSpPr/>
           <p:nvPr/>
         </p:nvSpPr>
         <p:spPr>
           <a:xfrm>
             <a:off x="547826" y="4676900"/>
-            <a:ext cx="580695" cy="142435"/>
+            <a:ext cx="580695" cy="131479"/>
           </a:xfrm>
           <a:custGeom>
             <a:avLst/>
@@ -13398,7 +13706,7 @@
             <a:cxnLst/>
             <a:rect l="l" t="t" r="r" b="b"/>
             <a:pathLst>
-              <a:path w="580695" h="142435">
+              <a:path w="580695" h="131479">
                 <a:moveTo>
                   <a:pt x="0" y="0"/>
                 </a:moveTo>
@@ -13406,7 +13714,7 @@
                   <a:pt x="580695" y="0"/>
                 </a:lnTo>
                 <a:lnTo>
-                  <a:pt x="290347" y="142435"/>
+                  <a:pt x="290347" y="131479"/>
                 </a:lnTo>
                 <a:close/>
               </a:path>
@@ -13890,14 +14198,14 @@
       </p:sp>
       <p:sp>
         <p:nvSpPr>
-          <p:cNvPr id="57" name="레일 쐐기"/>
+          <p:cNvPr id="57" name="레일 삼각형"/>
           <p:cNvSpPr/>
           <p:nvPr/>
         </p:nvSpPr>
         <p:spPr>
           <a:xfrm>
             <a:off x="547826" y="5370824"/>
-            <a:ext cx="580695" cy="142435"/>
+            <a:ext cx="580695" cy="131478"/>
           </a:xfrm>
           <a:custGeom>
             <a:avLst/>
@@ -13906,7 +14214,7 @@
             <a:cxnLst/>
             <a:rect l="l" t="t" r="r" b="b"/>
             <a:pathLst>
-              <a:path w="580695" h="142435">
+              <a:path w="580695" h="131478">
                 <a:moveTo>
                   <a:pt x="0" y="0"/>
                 </a:moveTo>
@@ -13914,7 +14222,7 @@
                   <a:pt x="580695" y="0"/>
                 </a:lnTo>
                 <a:lnTo>
-                  <a:pt x="290347" y="142435"/>
+                  <a:pt x="290347" y="131478"/>
                 </a:lnTo>
                 <a:close/>
               </a:path>
@@ -13945,12 +14253,10 @@
         <p:spPr>
           <a:xfrm>
             <a:off x="1161391" y="5392737"/>
-            <a:ext cx="1195357" cy="230087"/>
-          </a:xfrm>
-          <a:prstGeom prst="homePlate">
-            <a:avLst>
-              <a:gd name="adj" fmla="val 30000"/>
-            </a:avLst>
+            <a:ext cx="1129617" cy="230087"/>
+          </a:xfrm>
+          <a:prstGeom prst="rect">
+            <a:avLst/>
           </a:prstGeom>
           <a:solidFill>
             <a:srgbClr val="DEEEFF"/>
@@ -13997,13 +14303,11 @@
         </p:nvSpPr>
         <p:spPr>
           <a:xfrm>
-            <a:off x="2225270" y="5392737"/>
-            <a:ext cx="1261096" cy="230087"/>
-          </a:xfrm>
-          <a:prstGeom prst="chevron">
-            <a:avLst>
-              <a:gd name="adj" fmla="val 30000"/>
-            </a:avLst>
+            <a:off x="2291009" y="5392737"/>
+            <a:ext cx="1129617" cy="230087"/>
+          </a:xfrm>
+          <a:prstGeom prst="rect">
+            <a:avLst/>
           </a:prstGeom>
           <a:solidFill>
             <a:srgbClr val="BDE0FF"/>
@@ -14050,13 +14354,11 @@
         </p:nvSpPr>
         <p:spPr>
           <a:xfrm>
-            <a:off x="3354887" y="5392737"/>
-            <a:ext cx="1261096" cy="230087"/>
-          </a:xfrm>
-          <a:prstGeom prst="chevron">
-            <a:avLst>
-              <a:gd name="adj" fmla="val 30000"/>
-            </a:avLst>
+            <a:off x="3420626" y="5392737"/>
+            <a:ext cx="1129617" cy="230087"/>
+          </a:xfrm>
+          <a:prstGeom prst="rect">
+            <a:avLst/>
           </a:prstGeom>
           <a:solidFill>
             <a:srgbClr val="30C2FF"/>
@@ -14103,13 +14405,11 @@
         </p:nvSpPr>
         <p:spPr>
           <a:xfrm>
-            <a:off x="4484504" y="5392737"/>
-            <a:ext cx="1261096" cy="230087"/>
-          </a:xfrm>
-          <a:prstGeom prst="chevron">
-            <a:avLst>
-              <a:gd name="adj" fmla="val 30000"/>
-            </a:avLst>
+            <a:off x="4550243" y="5392737"/>
+            <a:ext cx="1129617" cy="230087"/>
+          </a:xfrm>
+          <a:prstGeom prst="rect">
+            <a:avLst/>
           </a:prstGeom>
           <a:solidFill>
             <a:srgbClr val="0051BC"/>
@@ -14156,13 +14456,11 @@
         </p:nvSpPr>
         <p:spPr>
           <a:xfrm>
-            <a:off x="5614122" y="5392737"/>
-            <a:ext cx="1195357" cy="230087"/>
-          </a:xfrm>
-          <a:prstGeom prst="chevron">
-            <a:avLst>
-              <a:gd name="adj" fmla="val 30000"/>
-            </a:avLst>
+            <a:off x="5679861" y="5392737"/>
+            <a:ext cx="1129617" cy="230087"/>
+          </a:xfrm>
+          <a:prstGeom prst="rect">
+            <a:avLst/>
           </a:prstGeom>
           <a:solidFill>
             <a:srgbClr val="0051BC"/>
@@ -14203,7 +14501,199 @@
       </p:sp>
       <p:sp>
         <p:nvSpPr>
-          <p:cNvPr id="63" name="칸 본문"/>
+          <p:cNvPr id="63" name="단계 삼각형"/>
+          <p:cNvSpPr/>
+          <p:nvPr/>
+        </p:nvSpPr>
+        <p:spPr>
+          <a:xfrm>
+            <a:off x="2291008" y="5392737"/>
+            <a:ext cx="109565" cy="230087"/>
+          </a:xfrm>
+          <a:custGeom>
+            <a:avLst/>
+            <a:gdLst/>
+            <a:ahLst/>
+            <a:cxnLst/>
+            <a:rect l="l" t="t" r="r" b="b"/>
+            <a:pathLst>
+              <a:path w="109565" h="230087">
+                <a:moveTo>
+                  <a:pt x="0" y="0"/>
+                </a:moveTo>
+                <a:lnTo>
+                  <a:pt x="109565" y="115043"/>
+                </a:lnTo>
+                <a:lnTo>
+                  <a:pt x="0" y="230087"/>
+                </a:lnTo>
+                <a:close/>
+              </a:path>
+            </a:pathLst>
+          </a:custGeom>
+          <a:solidFill>
+            <a:srgbClr val="DEEEFF"/>
+          </a:solidFill>
+          <a:ln>
+            <a:noFill/>
+          </a:ln>
+          <a:effectLst/>
+        </p:spPr>
+        <p:txBody>
+          <a:bodyPr rtlCol="0" anchor="ctr"/>
+          <a:lstStyle/>
+          <a:p>
+            <a:pPr algn="ctr"/>
+          </a:p>
+        </p:txBody>
+      </p:sp>
+      <p:sp>
+        <p:nvSpPr>
+          <p:cNvPr id="64" name="단계 삼각형"/>
+          <p:cNvSpPr/>
+          <p:nvPr/>
+        </p:nvSpPr>
+        <p:spPr>
+          <a:xfrm>
+            <a:off x="3420626" y="5392737"/>
+            <a:ext cx="109565" cy="230087"/>
+          </a:xfrm>
+          <a:custGeom>
+            <a:avLst/>
+            <a:gdLst/>
+            <a:ahLst/>
+            <a:cxnLst/>
+            <a:rect l="l" t="t" r="r" b="b"/>
+            <a:pathLst>
+              <a:path w="109565" h="230087">
+                <a:moveTo>
+                  <a:pt x="0" y="0"/>
+                </a:moveTo>
+                <a:lnTo>
+                  <a:pt x="109565" y="115043"/>
+                </a:lnTo>
+                <a:lnTo>
+                  <a:pt x="0" y="230087"/>
+                </a:lnTo>
+                <a:close/>
+              </a:path>
+            </a:pathLst>
+          </a:custGeom>
+          <a:solidFill>
+            <a:srgbClr val="BDE0FF"/>
+          </a:solidFill>
+          <a:ln>
+            <a:noFill/>
+          </a:ln>
+          <a:effectLst/>
+        </p:spPr>
+        <p:txBody>
+          <a:bodyPr rtlCol="0" anchor="ctr"/>
+          <a:lstStyle/>
+          <a:p>
+            <a:pPr algn="ctr"/>
+          </a:p>
+        </p:txBody>
+      </p:sp>
+      <p:sp>
+        <p:nvSpPr>
+          <p:cNvPr id="65" name="단계 삼각형"/>
+          <p:cNvSpPr/>
+          <p:nvPr/>
+        </p:nvSpPr>
+        <p:spPr>
+          <a:xfrm>
+            <a:off x="4550243" y="5392737"/>
+            <a:ext cx="109565" cy="230087"/>
+          </a:xfrm>
+          <a:custGeom>
+            <a:avLst/>
+            <a:gdLst/>
+            <a:ahLst/>
+            <a:cxnLst/>
+            <a:rect l="l" t="t" r="r" b="b"/>
+            <a:pathLst>
+              <a:path w="109565" h="230087">
+                <a:moveTo>
+                  <a:pt x="0" y="0"/>
+                </a:moveTo>
+                <a:lnTo>
+                  <a:pt x="109565" y="115043"/>
+                </a:lnTo>
+                <a:lnTo>
+                  <a:pt x="0" y="230087"/>
+                </a:lnTo>
+                <a:close/>
+              </a:path>
+            </a:pathLst>
+          </a:custGeom>
+          <a:solidFill>
+            <a:srgbClr val="30C2FF"/>
+          </a:solidFill>
+          <a:ln>
+            <a:noFill/>
+          </a:ln>
+          <a:effectLst/>
+        </p:spPr>
+        <p:txBody>
+          <a:bodyPr rtlCol="0" anchor="ctr"/>
+          <a:lstStyle/>
+          <a:p>
+            <a:pPr algn="ctr"/>
+          </a:p>
+        </p:txBody>
+      </p:sp>
+      <p:sp>
+        <p:nvSpPr>
+          <p:cNvPr id="66" name="단계 삼각형"/>
+          <p:cNvSpPr/>
+          <p:nvPr/>
+        </p:nvSpPr>
+        <p:spPr>
+          <a:xfrm>
+            <a:off x="5679860" y="5392737"/>
+            <a:ext cx="109566" cy="230087"/>
+          </a:xfrm>
+          <a:custGeom>
+            <a:avLst/>
+            <a:gdLst/>
+            <a:ahLst/>
+            <a:cxnLst/>
+            <a:rect l="l" t="t" r="r" b="b"/>
+            <a:pathLst>
+              <a:path w="109566" h="230087">
+                <a:moveTo>
+                  <a:pt x="0" y="0"/>
+                </a:moveTo>
+                <a:lnTo>
+                  <a:pt x="109566" y="115043"/>
+                </a:lnTo>
+                <a:lnTo>
+                  <a:pt x="0" y="230087"/>
+                </a:lnTo>
+                <a:close/>
+              </a:path>
+            </a:pathLst>
+          </a:custGeom>
+          <a:solidFill>
+            <a:srgbClr val="0051BC"/>
+          </a:solidFill>
+          <a:ln>
+            <a:noFill/>
+          </a:ln>
+          <a:effectLst/>
+        </p:spPr>
+        <p:txBody>
+          <a:bodyPr rtlCol="0" anchor="ctr"/>
+          <a:lstStyle/>
+          <a:p>
+            <a:pPr algn="ctr"/>
+          </a:p>
+        </p:txBody>
+      </p:sp>
+      <p:sp>
+        <p:nvSpPr>
+          <p:cNvPr id="67" name="칸 본문"/>
           <p:cNvSpPr txBox="1"/>
           <p:nvPr/>
         </p:nvSpPr>
@@ -14254,7 +14744,7 @@
       </p:sp>
       <p:sp>
         <p:nvSpPr>
-          <p:cNvPr id="64" name="칸 본문"/>
+          <p:cNvPr id="68" name="칸 본문"/>
           <p:cNvSpPr txBox="1"/>
           <p:nvPr/>
         </p:nvSpPr>
@@ -14305,7 +14795,7 @@
       </p:sp>
       <p:cxnSp>
         <p:nvCxnSpPr>
-          <p:cNvPr id="65" name="Connector 64"/>
+          <p:cNvPr id="69" name="Connector 68"/>
           <p:cNvCxnSpPr/>
           <p:nvPr/>
         </p:nvCxnSpPr>
@@ -14326,7 +14816,7 @@
       </p:cxnSp>
       <p:sp>
         <p:nvSpPr>
-          <p:cNvPr id="66" name="칸 본문"/>
+          <p:cNvPr id="70" name="칸 본문"/>
           <p:cNvSpPr txBox="1"/>
           <p:nvPr/>
         </p:nvSpPr>
@@ -14377,7 +14867,7 @@
       </p:sp>
       <p:cxnSp>
         <p:nvCxnSpPr>
-          <p:cNvPr id="67" name="Connector 66"/>
+          <p:cNvPr id="71" name="Connector 70"/>
           <p:cNvCxnSpPr/>
           <p:nvPr/>
         </p:nvCxnSpPr>
@@ -14398,7 +14888,7 @@
       </p:cxnSp>
       <p:sp>
         <p:nvSpPr>
-          <p:cNvPr id="68" name="칸 본문"/>
+          <p:cNvPr id="72" name="칸 본문"/>
           <p:cNvSpPr txBox="1"/>
           <p:nvPr/>
         </p:nvSpPr>
@@ -14449,7 +14939,7 @@
       </p:sp>
       <p:cxnSp>
         <p:nvCxnSpPr>
-          <p:cNvPr id="69" name="Connector 68"/>
+          <p:cNvPr id="73" name="Connector 72"/>
           <p:cNvCxnSpPr/>
           <p:nvPr/>
         </p:nvCxnSpPr>
@@ -14470,7 +14960,7 @@
       </p:cxnSp>
       <p:sp>
         <p:nvSpPr>
-          <p:cNvPr id="70" name="칸 본문"/>
+          <p:cNvPr id="74" name="칸 본문"/>
           <p:cNvSpPr txBox="1"/>
           <p:nvPr/>
         </p:nvSpPr>
@@ -14521,7 +15011,7 @@
       </p:sp>
       <p:cxnSp>
         <p:nvCxnSpPr>
-          <p:cNvPr id="71" name="Connector 70"/>
+          <p:cNvPr id="75" name="Connector 74"/>
           <p:cNvCxnSpPr/>
           <p:nvPr/>
         </p:nvCxnSpPr>
@@ -14542,108 +15032,36 @@
       </p:cxnSp>
       <p:sp>
         <p:nvSpPr>
-          <p:cNvPr id="72" name="연결 막대"/>
+          <p:cNvPr id="76" name="삼각 화살표"/>
           <p:cNvSpPr/>
           <p:nvPr/>
         </p:nvSpPr>
         <p:spPr>
           <a:xfrm>
-            <a:off x="1698261" y="6092139"/>
-            <a:ext cx="4601739" cy="32870"/>
-          </a:xfrm>
-          <a:prstGeom prst="rect">
-            <a:avLst/>
-          </a:prstGeom>
-          <a:solidFill>
-            <a:srgbClr val="BDE0FF"/>
-          </a:solidFill>
-          <a:ln>
-            <a:noFill/>
-          </a:ln>
-          <a:effectLst/>
-        </p:spPr>
-        <p:txBody>
-          <a:bodyPr rtlCol="0" anchor="ctr" lIns="0" rIns="0" tIns="0" bIns="0"/>
-          <a:lstStyle/>
-          <a:p>
-            <a:pPr algn="ctr"/>
-          </a:p>
-        </p:txBody>
-      </p:sp>
-      <p:sp>
-        <p:nvSpPr>
-          <p:cNvPr id="73" name="연결 끝"/>
-          <p:cNvSpPr/>
-          <p:nvPr/>
-        </p:nvSpPr>
-        <p:spPr>
-          <a:xfrm>
-            <a:off x="1698261" y="6092139"/>
-            <a:ext cx="27391" cy="76696"/>
-          </a:xfrm>
-          <a:prstGeom prst="rect">
-            <a:avLst/>
-          </a:prstGeom>
-          <a:solidFill>
-            <a:srgbClr val="BDE0FF"/>
-          </a:solidFill>
-          <a:ln>
-            <a:noFill/>
-          </a:ln>
-          <a:effectLst/>
-        </p:spPr>
-        <p:txBody>
-          <a:bodyPr rtlCol="0" anchor="ctr" lIns="0" rIns="0" tIns="0" bIns="0"/>
-          <a:lstStyle/>
-          <a:p>
-            <a:pPr algn="ctr"/>
-          </a:p>
-        </p:txBody>
-      </p:sp>
-      <p:sp>
-        <p:nvSpPr>
-          <p:cNvPr id="74" name="연결 끝"/>
-          <p:cNvSpPr/>
-          <p:nvPr/>
-        </p:nvSpPr>
-        <p:spPr>
-          <a:xfrm>
-            <a:off x="6272609" y="6092139"/>
-            <a:ext cx="27391" cy="76696"/>
-          </a:xfrm>
-          <a:prstGeom prst="rect">
-            <a:avLst/>
-          </a:prstGeom>
-          <a:solidFill>
-            <a:srgbClr val="BDE0FF"/>
-          </a:solidFill>
-          <a:ln>
-            <a:noFill/>
-          </a:ln>
-          <a:effectLst/>
-        </p:spPr>
-        <p:txBody>
-          <a:bodyPr rtlCol="0" anchor="ctr" lIns="0" rIns="0" tIns="0" bIns="0"/>
-          <a:lstStyle/>
-          <a:p>
-            <a:pPr algn="ctr"/>
-          </a:p>
-        </p:txBody>
-      </p:sp>
-      <p:sp>
-        <p:nvSpPr>
-          <p:cNvPr id="75" name="연결 화살표"/>
-          <p:cNvSpPr/>
-          <p:nvPr/>
-        </p:nvSpPr>
-        <p:spPr>
-          <a:xfrm>
-            <a:off x="3889565" y="6108574"/>
-            <a:ext cx="219130" cy="169826"/>
-          </a:xfrm>
-          <a:prstGeom prst="downArrow">
-            <a:avLst/>
-          </a:prstGeom>
+            <a:off x="3823826" y="6108573"/>
+            <a:ext cx="350608" cy="142435"/>
+          </a:xfrm>
+          <a:custGeom>
+            <a:avLst/>
+            <a:gdLst/>
+            <a:ahLst/>
+            <a:cxnLst/>
+            <a:rect l="l" t="t" r="r" b="b"/>
+            <a:pathLst>
+              <a:path w="350608" h="142435">
+                <a:moveTo>
+                  <a:pt x="0" y="0"/>
+                </a:moveTo>
+                <a:lnTo>
+                  <a:pt x="350608" y="0"/>
+                </a:lnTo>
+                <a:lnTo>
+                  <a:pt x="175304" y="142435"/>
+                </a:lnTo>
+                <a:close/>
+              </a:path>
+            </a:pathLst>
+          </a:custGeom>
           <a:solidFill>
             <a:srgbClr val="0051BC"/>
           </a:solidFill>
@@ -14653,7 +15071,7 @@
           <a:effectLst/>
         </p:spPr>
         <p:txBody>
-          <a:bodyPr rtlCol="0" anchor="ctr" lIns="0" rIns="0" tIns="0" bIns="0"/>
+          <a:bodyPr rtlCol="0" anchor="ctr"/>
           <a:lstStyle/>
           <a:p>
             <a:pPr algn="ctr"/>
@@ -14662,7 +15080,7 @@
       </p:sp>
       <p:sp>
         <p:nvSpPr>
-          <p:cNvPr id="76" name="라벨 박스"/>
+          <p:cNvPr id="77" name="라벨 박스"/>
           <p:cNvSpPr/>
           <p:nvPr/>
         </p:nvSpPr>
@@ -14694,7 +15112,7 @@
       </p:sp>
       <p:sp>
         <p:nvSpPr>
-          <p:cNvPr id="77" name="레일"/>
+          <p:cNvPr id="78" name="레일"/>
           <p:cNvSpPr/>
           <p:nvPr/>
         </p:nvSpPr>
@@ -14750,7 +15168,7 @@
       </p:sp>
       <p:sp>
         <p:nvSpPr>
-          <p:cNvPr id="78" name="강조 바"/>
+          <p:cNvPr id="79" name="강조 바"/>
           <p:cNvSpPr/>
           <p:nvPr/>
         </p:nvSpPr>
@@ -14780,7 +15198,7 @@
       </p:sp>
       <p:sp>
         <p:nvSpPr>
-          <p:cNvPr id="79" name="강조 바 글"/>
+          <p:cNvPr id="80" name="강조 바 글"/>
           <p:cNvSpPr txBox="1"/>
           <p:nvPr/>
         </p:nvSpPr>
@@ -14827,7 +15245,7 @@
       </p:sp>
       <p:sp>
         <p:nvSpPr>
-          <p:cNvPr id="80" name="라벨 박스"/>
+          <p:cNvPr id="81" name="라벨 박스"/>
           <p:cNvSpPr/>
           <p:nvPr/>
         </p:nvSpPr>
@@ -14859,7 +15277,7 @@
       </p:sp>
       <p:sp>
         <p:nvSpPr>
-          <p:cNvPr id="81" name="레일"/>
+          <p:cNvPr id="82" name="레일"/>
           <p:cNvSpPr/>
           <p:nvPr/>
         </p:nvSpPr>
@@ -14915,7 +15333,7 @@
       </p:sp>
       <p:sp>
         <p:nvSpPr>
-          <p:cNvPr id="82" name="칸 본문"/>
+          <p:cNvPr id="83" name="칸 본문"/>
           <p:cNvSpPr txBox="1"/>
           <p:nvPr/>
         </p:nvSpPr>
@@ -14994,7 +15412,7 @@
       </p:sp>
       <p:sp>
         <p:nvSpPr>
-          <p:cNvPr id="83" name="칸 본문"/>
+          <p:cNvPr id="84" name="칸 본문"/>
           <p:cNvSpPr txBox="1"/>
           <p:nvPr/>
         </p:nvSpPr>
@@ -15073,7 +15491,7 @@
       </p:sp>
       <p:cxnSp>
         <p:nvCxnSpPr>
-          <p:cNvPr id="84" name="Connector 83"/>
+          <p:cNvPr id="85" name="Connector 84"/>
           <p:cNvCxnSpPr/>
           <p:nvPr/>
         </p:nvCxnSpPr>
@@ -15094,7 +15512,7 @@
       </p:cxnSp>
       <p:sp>
         <p:nvSpPr>
-          <p:cNvPr id="85" name="칸 본문"/>
+          <p:cNvPr id="86" name="칸 본문"/>
           <p:cNvSpPr txBox="1"/>
           <p:nvPr/>
         </p:nvSpPr>
@@ -15173,7 +15591,7 @@
       </p:sp>
       <p:cxnSp>
         <p:nvCxnSpPr>
-          <p:cNvPr id="86" name="Connector 85"/>
+          <p:cNvPr id="87" name="Connector 86"/>
           <p:cNvCxnSpPr/>
           <p:nvPr/>
         </p:nvCxnSpPr>
@@ -15194,7 +15612,7 @@
       </p:cxnSp>
       <p:sp>
         <p:nvSpPr>
-          <p:cNvPr id="87" name="핵심성과 박스"/>
+          <p:cNvPr id="88" name="핵심성과 박스"/>
           <p:cNvSpPr/>
           <p:nvPr/>
         </p:nvSpPr>
@@ -15226,7 +15644,7 @@
       </p:sp>
       <p:sp>
         <p:nvSpPr>
-          <p:cNvPr id="88" name="핵심성과 라벨"/>
+          <p:cNvPr id="89" name="핵심성과 라벨"/>
           <p:cNvSpPr/>
           <p:nvPr/>
         </p:nvSpPr>
@@ -15279,7 +15697,7 @@
       </p:sp>
       <p:sp>
         <p:nvSpPr>
-          <p:cNvPr id="89" name="핵심성과 문구"/>
+          <p:cNvPr id="90" name="핵심성과 문구"/>
           <p:cNvSpPr txBox="1"/>
           <p:nvPr/>
         </p:nvSpPr>
@@ -15330,7 +15748,7 @@
       </p:sp>
       <p:sp>
         <p:nvSpPr>
-          <p:cNvPr id="90" name="평가내용 라벨"/>
+          <p:cNvPr id="91" name="평가내용 라벨"/>
           <p:cNvSpPr/>
           <p:nvPr/>
         </p:nvSpPr>
@@ -15393,7 +15811,7 @@
       </p:sp>
       <p:sp>
         <p:nvSpPr>
-          <p:cNvPr id="91" name="평가내용 제목 박스"/>
+          <p:cNvPr id="92" name="평가내용 제목 박스"/>
           <p:cNvSpPr/>
           <p:nvPr/>
         </p:nvSpPr>
@@ -15425,7 +15843,7 @@
       </p:sp>
       <p:sp>
         <p:nvSpPr>
-          <p:cNvPr id="92" name="평가내용 제목"/>
+          <p:cNvPr id="93" name="평가내용 제목"/>
           <p:cNvSpPr txBox="1"/>
           <p:nvPr/>
         </p:nvSpPr>
@@ -15472,7 +15890,7 @@
       </p:sp>
       <p:sp>
         <p:nvSpPr>
-          <p:cNvPr id="93" name="점"/>
+          <p:cNvPr id="94" name="점"/>
           <p:cNvSpPr/>
           <p:nvPr/>
         </p:nvSpPr>
@@ -15502,7 +15920,7 @@
       </p:sp>
       <p:sp>
         <p:nvSpPr>
-          <p:cNvPr id="94" name="점"/>
+          <p:cNvPr id="95" name="점"/>
           <p:cNvSpPr/>
           <p:nvPr/>
         </p:nvSpPr>
@@ -15532,7 +15950,7 @@
       </p:sp>
       <p:sp>
         <p:nvSpPr>
-          <p:cNvPr id="95" name="점"/>
+          <p:cNvPr id="96" name="점"/>
           <p:cNvSpPr/>
           <p:nvPr/>
         </p:nvSpPr>
@@ -15562,7 +15980,7 @@
       </p:sp>
       <p:sp>
         <p:nvSpPr>
-          <p:cNvPr id="96" name="점"/>
+          <p:cNvPr id="97" name="점"/>
           <p:cNvSpPr/>
           <p:nvPr/>
         </p:nvSpPr>
@@ -15592,7 +16010,7 @@
       </p:sp>
       <p:sp>
         <p:nvSpPr>
-          <p:cNvPr id="97" name="점"/>
+          <p:cNvPr id="98" name="점"/>
           <p:cNvSpPr/>
           <p:nvPr/>
         </p:nvSpPr>
@@ -15622,7 +16040,7 @@
       </p:sp>
       <p:sp>
         <p:nvSpPr>
-          <p:cNvPr id="98" name="번호 띠"/>
+          <p:cNvPr id="99" name="번호 띠"/>
           <p:cNvSpPr/>
           <p:nvPr/>
         </p:nvSpPr>
@@ -15662,7 +16080,7 @@
       </p:sp>
       <p:sp>
         <p:nvSpPr>
-          <p:cNvPr id="99" name="번호 탭"/>
+          <p:cNvPr id="100" name="번호 탭"/>
           <p:cNvSpPr/>
           <p:nvPr/>
         </p:nvSpPr>
@@ -15721,7 +16139,7 @@
       </p:sp>
       <p:sp>
         <p:nvSpPr>
-          <p:cNvPr id="100" name="번호 탭 빗면"/>
+          <p:cNvPr id="101" name="번호 탭 빗면"/>
           <p:cNvSpPr/>
           <p:nvPr/>
         </p:nvSpPr>
@@ -15772,7 +16190,7 @@
       </p:sp>
       <p:sp>
         <p:nvSpPr>
-          <p:cNvPr id="101" name="번호"/>
+          <p:cNvPr id="102" name="번호"/>
           <p:cNvSpPr txBox="1"/>
           <p:nvPr/>
         </p:nvSpPr>
@@ -15819,7 +16237,7 @@
       </p:sp>
       <p:sp>
         <p:nvSpPr>
-          <p:cNvPr id="102" name="번호 띠 제목"/>
+          <p:cNvPr id="103" name="번호 띠 제목"/>
           <p:cNvSpPr txBox="1"/>
           <p:nvPr/>
         </p:nvSpPr>
@@ -15866,7 +16284,7 @@
       </p:sp>
       <p:sp>
         <p:nvSpPr>
-          <p:cNvPr id="103" name="형광 밑줄"/>
+          <p:cNvPr id="104" name="형광 밑줄"/>
           <p:cNvSpPr/>
           <p:nvPr/>
         </p:nvSpPr>
@@ -15896,7 +16314,7 @@
       </p:sp>
       <p:sp>
         <p:nvSpPr>
-          <p:cNvPr id="104" name="소제목"/>
+          <p:cNvPr id="105" name="소제목"/>
           <p:cNvSpPr txBox="1"/>
           <p:nvPr/>
         </p:nvSpPr>
@@ -15943,7 +16361,7 @@
       </p:sp>
       <p:sp>
         <p:nvSpPr>
-          <p:cNvPr id="105" name="태그칩"/>
+          <p:cNvPr id="106" name="태그칩"/>
           <p:cNvSpPr/>
           <p:nvPr/>
         </p:nvSpPr>
@@ -15994,7 +16412,7 @@
       </p:sp>
       <p:sp>
         <p:nvSpPr>
-          <p:cNvPr id="106" name="라벨 박스"/>
+          <p:cNvPr id="107" name="라벨 박스"/>
           <p:cNvSpPr/>
           <p:nvPr/>
         </p:nvSpPr>
@@ -16026,7 +16444,7 @@
       </p:sp>
       <p:sp>
         <p:nvSpPr>
-          <p:cNvPr id="107" name="레일"/>
+          <p:cNvPr id="108" name="레일"/>
           <p:cNvSpPr/>
           <p:nvPr/>
         </p:nvSpPr>
@@ -16082,7 +16500,7 @@
       </p:sp>
       <p:sp>
         <p:nvSpPr>
-          <p:cNvPr id="108" name="가운데 글"/>
+          <p:cNvPr id="109" name="가운데 글"/>
           <p:cNvSpPr txBox="1"/>
           <p:nvPr/>
         </p:nvSpPr>
@@ -16558,108 +16976,36 @@
       </p:cxnSp>
       <p:sp>
         <p:nvSpPr>
-          <p:cNvPr id="11" name="연결 막대"/>
+          <p:cNvPr id="11" name="삼각 화살표"/>
           <p:cNvSpPr/>
           <p:nvPr/>
         </p:nvSpPr>
         <p:spPr>
           <a:xfrm>
-            <a:off x="1884522" y="1504706"/>
-            <a:ext cx="4601739" cy="32870"/>
-          </a:xfrm>
-          <a:prstGeom prst="rect">
-            <a:avLst/>
-          </a:prstGeom>
-          <a:solidFill>
-            <a:srgbClr val="BDE0FF"/>
-          </a:solidFill>
-          <a:ln>
-            <a:noFill/>
-          </a:ln>
-          <a:effectLst/>
-        </p:spPr>
-        <p:txBody>
-          <a:bodyPr rtlCol="0" anchor="ctr" lIns="0" rIns="0" tIns="0" bIns="0"/>
-          <a:lstStyle/>
-          <a:p>
-            <a:pPr algn="ctr"/>
-          </a:p>
-        </p:txBody>
-      </p:sp>
-      <p:sp>
-        <p:nvSpPr>
-          <p:cNvPr id="12" name="연결 끝"/>
-          <p:cNvSpPr/>
-          <p:nvPr/>
-        </p:nvSpPr>
-        <p:spPr>
-          <a:xfrm>
-            <a:off x="1884522" y="1504706"/>
-            <a:ext cx="27391" cy="76696"/>
-          </a:xfrm>
-          <a:prstGeom prst="rect">
-            <a:avLst/>
-          </a:prstGeom>
-          <a:solidFill>
-            <a:srgbClr val="BDE0FF"/>
-          </a:solidFill>
-          <a:ln>
-            <a:noFill/>
-          </a:ln>
-          <a:effectLst/>
-        </p:spPr>
-        <p:txBody>
-          <a:bodyPr rtlCol="0" anchor="ctr" lIns="0" rIns="0" tIns="0" bIns="0"/>
-          <a:lstStyle/>
-          <a:p>
-            <a:pPr algn="ctr"/>
-          </a:p>
-        </p:txBody>
-      </p:sp>
-      <p:sp>
-        <p:nvSpPr>
-          <p:cNvPr id="13" name="연결 끝"/>
-          <p:cNvSpPr/>
-          <p:nvPr/>
-        </p:nvSpPr>
-        <p:spPr>
-          <a:xfrm>
-            <a:off x="6458870" y="1504706"/>
-            <a:ext cx="27391" cy="76696"/>
-          </a:xfrm>
-          <a:prstGeom prst="rect">
-            <a:avLst/>
-          </a:prstGeom>
-          <a:solidFill>
-            <a:srgbClr val="BDE0FF"/>
-          </a:solidFill>
-          <a:ln>
-            <a:noFill/>
-          </a:ln>
-          <a:effectLst/>
-        </p:spPr>
-        <p:txBody>
-          <a:bodyPr rtlCol="0" anchor="ctr" lIns="0" rIns="0" tIns="0" bIns="0"/>
-          <a:lstStyle/>
-          <a:p>
-            <a:pPr algn="ctr"/>
-          </a:p>
-        </p:txBody>
-      </p:sp>
-      <p:sp>
-        <p:nvSpPr>
-          <p:cNvPr id="14" name="연결 화살표"/>
-          <p:cNvSpPr/>
-          <p:nvPr/>
-        </p:nvSpPr>
-        <p:spPr>
-          <a:xfrm>
-            <a:off x="4075826" y="1521141"/>
-            <a:ext cx="219130" cy="169826"/>
-          </a:xfrm>
-          <a:prstGeom prst="downArrow">
-            <a:avLst/>
-          </a:prstGeom>
+            <a:off x="4010086" y="1521140"/>
+            <a:ext cx="350609" cy="142435"/>
+          </a:xfrm>
+          <a:custGeom>
+            <a:avLst/>
+            <a:gdLst/>
+            <a:ahLst/>
+            <a:cxnLst/>
+            <a:rect l="l" t="t" r="r" b="b"/>
+            <a:pathLst>
+              <a:path w="350609" h="142435">
+                <a:moveTo>
+                  <a:pt x="0" y="0"/>
+                </a:moveTo>
+                <a:lnTo>
+                  <a:pt x="350609" y="0"/>
+                </a:lnTo>
+                <a:lnTo>
+                  <a:pt x="175305" y="142435"/>
+                </a:lnTo>
+                <a:close/>
+              </a:path>
+            </a:pathLst>
+          </a:custGeom>
           <a:solidFill>
             <a:srgbClr val="0051BC"/>
           </a:solidFill>
@@ -16669,7 +17015,7 @@
           <a:effectLst/>
         </p:spPr>
         <p:txBody>
-          <a:bodyPr rtlCol="0" anchor="ctr" lIns="0" rIns="0" tIns="0" bIns="0"/>
+          <a:bodyPr rtlCol="0" anchor="ctr"/>
           <a:lstStyle/>
           <a:p>
             <a:pPr algn="ctr"/>
@@ -16678,7 +17024,7 @@
       </p:sp>
       <p:graphicFrame>
         <p:nvGraphicFramePr>
-          <p:cNvPr id="15" name="실적표"/>
+          <p:cNvPr id="12" name="실적표"/>
           <p:cNvGraphicFramePr>
             <a:graphicFrameLocks noGrp="1"/>
           </p:cNvGraphicFramePr>
@@ -18386,7 +18732,7 @@
       </p:graphicFrame>
       <p:sp>
         <p:nvSpPr>
-          <p:cNvPr id="16" name="형광 밑줄"/>
+          <p:cNvPr id="13" name="형광 밑줄"/>
           <p:cNvSpPr/>
           <p:nvPr/>
         </p:nvSpPr>
@@ -18416,7 +18762,7 @@
       </p:sp>
       <p:sp>
         <p:nvSpPr>
-          <p:cNvPr id="17" name="소제목"/>
+          <p:cNvPr id="14" name="소제목"/>
           <p:cNvSpPr txBox="1"/>
           <p:nvPr/>
         </p:nvSpPr>
@@ -18463,7 +18809,7 @@
       </p:sp>
       <p:sp>
         <p:nvSpPr>
-          <p:cNvPr id="18" name="태그칩"/>
+          <p:cNvPr id="15" name="태그칩"/>
           <p:cNvSpPr/>
           <p:nvPr/>
         </p:nvSpPr>
@@ -18514,7 +18860,7 @@
       </p:sp>
       <p:sp>
         <p:nvSpPr>
-          <p:cNvPr id="19" name="표 외곽"/>
+          <p:cNvPr id="16" name="표 외곽"/>
           <p:cNvSpPr/>
           <p:nvPr/>
         </p:nvSpPr>
@@ -18546,7 +18892,7 @@
       </p:sp>
       <p:sp>
         <p:nvSpPr>
-          <p:cNvPr id="20" name="레일"/>
+          <p:cNvPr id="17" name="레일"/>
           <p:cNvSpPr/>
           <p:nvPr/>
         </p:nvSpPr>
@@ -18626,7 +18972,7 @@
       </p:sp>
       <p:sp>
         <p:nvSpPr>
-          <p:cNvPr id="21" name="배너"/>
+          <p:cNvPr id="18" name="배너"/>
           <p:cNvSpPr/>
           <p:nvPr/>
         </p:nvSpPr>
@@ -18677,7 +19023,7 @@
       </p:sp>
       <p:sp>
         <p:nvSpPr>
-          <p:cNvPr id="22" name="머리칸"/>
+          <p:cNvPr id="19" name="머리칸"/>
           <p:cNvSpPr/>
           <p:nvPr/>
         </p:nvSpPr>
@@ -18728,7 +19074,7 @@
       </p:sp>
       <p:sp>
         <p:nvSpPr>
-          <p:cNvPr id="23" name="머리칸"/>
+          <p:cNvPr id="20" name="머리칸"/>
           <p:cNvSpPr/>
           <p:nvPr/>
         </p:nvSpPr>
@@ -18779,7 +19125,7 @@
       </p:sp>
       <p:sp>
         <p:nvSpPr>
-          <p:cNvPr id="24" name="머리칸"/>
+          <p:cNvPr id="21" name="머리칸"/>
           <p:cNvSpPr/>
           <p:nvPr/>
         </p:nvSpPr>
@@ -18830,7 +19176,7 @@
       </p:sp>
       <p:sp>
         <p:nvSpPr>
-          <p:cNvPr id="25" name="칸 본문"/>
+          <p:cNvPr id="22" name="칸 본문"/>
           <p:cNvSpPr txBox="1"/>
           <p:nvPr/>
         </p:nvSpPr>
@@ -18909,7 +19255,7 @@
       </p:sp>
       <p:sp>
         <p:nvSpPr>
-          <p:cNvPr id="26" name="칸 본문"/>
+          <p:cNvPr id="23" name="칸 본문"/>
           <p:cNvSpPr txBox="1"/>
           <p:nvPr/>
         </p:nvSpPr>
@@ -18988,7 +19334,7 @@
       </p:sp>
       <p:cxnSp>
         <p:nvCxnSpPr>
-          <p:cNvPr id="27" name="Connector 26"/>
+          <p:cNvPr id="24" name="Connector 23"/>
           <p:cNvCxnSpPr/>
           <p:nvPr/>
         </p:nvCxnSpPr>
@@ -19009,7 +19355,7 @@
       </p:cxnSp>
       <p:sp>
         <p:nvSpPr>
-          <p:cNvPr id="28" name="칸 본문"/>
+          <p:cNvPr id="25" name="칸 본문"/>
           <p:cNvSpPr txBox="1"/>
           <p:nvPr/>
         </p:nvSpPr>
@@ -19088,7 +19434,7 @@
       </p:sp>
       <p:cxnSp>
         <p:nvCxnSpPr>
-          <p:cNvPr id="29" name="Connector 28"/>
+          <p:cNvPr id="26" name="Connector 25"/>
           <p:cNvCxnSpPr/>
           <p:nvPr/>
         </p:nvCxnSpPr>
@@ -19109,7 +19455,7 @@
       </p:cxnSp>
       <p:sp>
         <p:nvSpPr>
-          <p:cNvPr id="30" name="태그"/>
+          <p:cNvPr id="27" name="태그"/>
           <p:cNvSpPr/>
           <p:nvPr/>
         </p:nvSpPr>
@@ -19160,7 +19506,7 @@
       </p:sp>
       <p:sp>
         <p:nvSpPr>
-          <p:cNvPr id="31" name="태그 설명"/>
+          <p:cNvPr id="28" name="태그 설명"/>
           <p:cNvSpPr txBox="1"/>
           <p:nvPr/>
         </p:nvSpPr>
@@ -19207,7 +19553,7 @@
       </p:sp>
       <p:sp>
         <p:nvSpPr>
-          <p:cNvPr id="32" name="레일"/>
+          <p:cNvPr id="29" name="레일"/>
           <p:cNvSpPr/>
           <p:nvPr/>
         </p:nvSpPr>
@@ -19287,14 +19633,14 @@
       </p:sp>
       <p:sp>
         <p:nvSpPr>
-          <p:cNvPr id="33" name="레일 쐐기"/>
+          <p:cNvPr id="30" name="레일 삼각형"/>
           <p:cNvSpPr/>
           <p:nvPr/>
         </p:nvSpPr>
         <p:spPr>
           <a:xfrm>
             <a:off x="734086" y="5567760"/>
-            <a:ext cx="580696" cy="142434"/>
+            <a:ext cx="580696" cy="131478"/>
           </a:xfrm>
           <a:custGeom>
             <a:avLst/>
@@ -19303,7 +19649,7 @@
             <a:cxnLst/>
             <a:rect l="l" t="t" r="r" b="b"/>
             <a:pathLst>
-              <a:path w="580696" h="142434">
+              <a:path w="580696" h="131478">
                 <a:moveTo>
                   <a:pt x="0" y="0"/>
                 </a:moveTo>
@@ -19311,7 +19657,7 @@
                   <a:pt x="580696" y="0"/>
                 </a:lnTo>
                 <a:lnTo>
-                  <a:pt x="290348" y="142434"/>
+                  <a:pt x="290348" y="131478"/>
                 </a:lnTo>
                 <a:close/>
               </a:path>
@@ -19335,7 +19681,7 @@
       </p:sp>
       <p:sp>
         <p:nvSpPr>
-          <p:cNvPr id="34" name="머리칸"/>
+          <p:cNvPr id="31" name="머리칸"/>
           <p:cNvSpPr/>
           <p:nvPr/>
         </p:nvSpPr>
@@ -19386,7 +19732,7 @@
       </p:sp>
       <p:sp>
         <p:nvSpPr>
-          <p:cNvPr id="35" name="칸 본문"/>
+          <p:cNvPr id="32" name="칸 본문"/>
           <p:cNvSpPr txBox="1"/>
           <p:nvPr/>
         </p:nvSpPr>
@@ -19493,7 +19839,7 @@
       </p:sp>
       <p:sp>
         <p:nvSpPr>
-          <p:cNvPr id="36" name="사진 칸"/>
+          <p:cNvPr id="33" name="사진 칸"/>
           <p:cNvSpPr/>
           <p:nvPr/>
         </p:nvSpPr>
@@ -19546,7 +19892,7 @@
       </p:sp>
       <p:sp>
         <p:nvSpPr>
-          <p:cNvPr id="37" name="표 외곽"/>
+          <p:cNvPr id="34" name="표 외곽"/>
           <p:cNvSpPr/>
           <p:nvPr/>
         </p:nvSpPr>
@@ -19578,7 +19924,7 @@
       </p:sp>
       <p:sp>
         <p:nvSpPr>
-          <p:cNvPr id="38" name="레일"/>
+          <p:cNvPr id="35" name="레일"/>
           <p:cNvSpPr/>
           <p:nvPr/>
         </p:nvSpPr>
@@ -19634,7 +19980,7 @@
       </p:sp>
       <p:sp>
         <p:nvSpPr>
-          <p:cNvPr id="39" name="머리칸"/>
+          <p:cNvPr id="36" name="머리칸"/>
           <p:cNvSpPr/>
           <p:nvPr/>
         </p:nvSpPr>
@@ -19685,7 +20031,7 @@
       </p:sp>
       <p:sp>
         <p:nvSpPr>
-          <p:cNvPr id="40" name="머리칸"/>
+          <p:cNvPr id="37" name="머리칸"/>
           <p:cNvSpPr/>
           <p:nvPr/>
         </p:nvSpPr>
@@ -19736,7 +20082,7 @@
       </p:sp>
       <p:sp>
         <p:nvSpPr>
-          <p:cNvPr id="41" name="칸 본문"/>
+          <p:cNvPr id="38" name="칸 본문"/>
           <p:cNvSpPr txBox="1"/>
           <p:nvPr/>
         </p:nvSpPr>
@@ -19787,7 +20133,7 @@
       </p:sp>
       <p:sp>
         <p:nvSpPr>
-          <p:cNvPr id="42" name="칸 본문"/>
+          <p:cNvPr id="39" name="칸 본문"/>
           <p:cNvSpPr txBox="1"/>
           <p:nvPr/>
         </p:nvSpPr>
@@ -19866,7 +20212,7 @@
       </p:sp>
       <p:cxnSp>
         <p:nvCxnSpPr>
-          <p:cNvPr id="43" name="Connector 42"/>
+          <p:cNvPr id="40" name="Connector 39"/>
           <p:cNvCxnSpPr/>
           <p:nvPr/>
         </p:nvCxnSpPr>
@@ -19887,7 +20233,7 @@
       </p:cxnSp>
       <p:sp>
         <p:nvSpPr>
-          <p:cNvPr id="44" name="핵심성과 박스"/>
+          <p:cNvPr id="41" name="핵심성과 박스"/>
           <p:cNvSpPr/>
           <p:nvPr/>
         </p:nvSpPr>
@@ -19919,7 +20265,7 @@
       </p:sp>
       <p:sp>
         <p:nvSpPr>
-          <p:cNvPr id="45" name="핵심성과 라벨"/>
+          <p:cNvPr id="42" name="핵심성과 라벨"/>
           <p:cNvSpPr/>
           <p:nvPr/>
         </p:nvSpPr>
@@ -19972,7 +20318,7 @@
       </p:sp>
       <p:sp>
         <p:nvSpPr>
-          <p:cNvPr id="46" name="핵심성과 문구"/>
+          <p:cNvPr id="43" name="핵심성과 문구"/>
           <p:cNvSpPr txBox="1"/>
           <p:nvPr/>
         </p:nvSpPr>
